--- a/docs/presentations/synapsegit_user_scenarios_ja.pptx
+++ b/docs/presentations/synapsegit_user_scenarios_ja.pptx
@@ -4200,7 +4200,7 @@
         <p:spPr>
           <a:xfrm>
             <a:off x="6080759" y="5349240"/>
-            <a:ext cx="1645920" cy="310896"/>
+            <a:ext cx="1645920" cy="320040"/>
           </a:xfrm>
           <a:prstGeom prst="rect">
             <a:avLst/>
@@ -5502,7 +5502,62 @@
       </p:sp>
       <p:sp>
         <p:nvSpPr>
-          <p:cNvPr id="11" name="Card: 02  条件を決める">
+          <p:cNvPr id="11" name="今すぐ試せる·v0.9.0" title="今すぐ試せる·v0.9.0" descr="今すぐ試せる·v0.9.0"/>
+          <p:cNvSpPr/>
+          <p:nvPr/>
+        </p:nvSpPr>
+        <p:spPr>
+          <a:xfrm>
+            <a:off x="2578608" y="2441448"/>
+            <a:ext cx="1481328" cy="237744"/>
+          </a:xfrm>
+          <a:prstGeom prst="roundRect">
+            <a:avLst/>
+          </a:prstGeom>
+          <a:solidFill>
+            <a:srgbClr val="DCEEE4"/>
+          </a:solidFill>
+          <a:ln w="8890">
+            <a:solidFill>
+              <a:srgbClr val="29704A"/>
+            </a:solidFill>
+          </a:ln>
+        </p:spPr>
+        <p:style>
+          <a:lnRef idx="1">
+            <a:schemeClr val="accent1"/>
+          </a:lnRef>
+          <a:fillRef idx="3">
+            <a:schemeClr val="accent1"/>
+          </a:fillRef>
+          <a:effectRef idx="2">
+            <a:schemeClr val="accent1"/>
+          </a:effectRef>
+          <a:fontRef idx="minor">
+            <a:schemeClr val="lt1"/>
+          </a:fontRef>
+        </p:style>
+        <p:txBody>
+          <a:bodyPr rtlCol="0" anchor="ctr" lIns="0" rIns="0" tIns="0" bIns="0"/>
+          <a:lstStyle/>
+          <a:p>
+            <a:pPr algn="ctr"/>
+            <a:r>
+              <a:rPr sz="1050" b="1" lang="ja-JP">
+                <a:solidFill>
+                  <a:srgbClr val="29704A"/>
+                </a:solidFill>
+                <a:latin typeface="Noto Sans JP"/>
+                <a:ea typeface="Noto Sans JP"/>
+              </a:rPr>
+              <a:t>今すぐ試せる·v0.9.0</a:t>
+            </a:r>
+          </a:p>
+        </p:txBody>
+      </p:sp>
+      <p:sp>
+        <p:nvSpPr>
+          <p:cNvPr id="12" name="Card: 02  条件を決める">
             <a:extLst>
               <a:ext uri="{C183D7F6-B498-43B3-948B-1728B52AA6E4}">
                 <adec:decorative xmlns:adec="http://schemas.microsoft.com/office/drawing/2017/decorative" val="1"/>
@@ -5553,7 +5608,7 @@
       </p:sp>
       <p:sp>
         <p:nvSpPr>
-          <p:cNvPr id="12" name="Accent: 02  条件を決める">
+          <p:cNvPr id="13" name="Accent: 02  条件を決める">
             <a:extLst>
               <a:ext uri="{C183D7F6-B498-43B3-948B-1728B52AA6E4}">
                 <adec:decorative xmlns:adec="http://schemas.microsoft.com/office/drawing/2017/decorative" val="1"/>
@@ -5602,7 +5657,7 @@
       </p:sp>
       <p:sp>
         <p:nvSpPr>
-          <p:cNvPr id="13" name="Text: 02  条件を決める"/>
+          <p:cNvPr id="14" name="Text: 02  条件を決める"/>
           <p:cNvSpPr txBox="1"/>
           <p:nvPr/>
         </p:nvSpPr>
@@ -5642,7 +5697,7 @@
       </p:sp>
       <p:sp>
         <p:nvSpPr>
-          <p:cNvPr id="14" name="Text: Imported／Repeatable／Cali"/>
+          <p:cNvPr id="15" name="Text: Imported／Repeatable／Cali"/>
           <p:cNvSpPr txBox="1"/>
           <p:nvPr/>
         </p:nvSpPr>
@@ -5682,7 +5737,62 @@
       </p:sp>
       <p:sp>
         <p:nvSpPr>
-          <p:cNvPr id="15" name="Card: 03  節目で撮る">
+          <p:cNvPr id="16" name="構想・未実装" title="構想・未実装" descr="構想・未実装"/>
+          <p:cNvSpPr/>
+          <p:nvPr/>
+        </p:nvSpPr>
+        <p:spPr>
+          <a:xfrm>
+            <a:off x="6327648" y="2441448"/>
+            <a:ext cx="1481328" cy="237744"/>
+          </a:xfrm>
+          <a:prstGeom prst="roundRect">
+            <a:avLst/>
+          </a:prstGeom>
+          <a:solidFill>
+            <a:srgbClr val="F5E4D4"/>
+          </a:solidFill>
+          <a:ln w="8890">
+            <a:solidFill>
+              <a:srgbClr val="8C450E"/>
+            </a:solidFill>
+          </a:ln>
+        </p:spPr>
+        <p:style>
+          <a:lnRef idx="1">
+            <a:schemeClr val="accent1"/>
+          </a:lnRef>
+          <a:fillRef idx="3">
+            <a:schemeClr val="accent1"/>
+          </a:fillRef>
+          <a:effectRef idx="2">
+            <a:schemeClr val="accent1"/>
+          </a:effectRef>
+          <a:fontRef idx="minor">
+            <a:schemeClr val="lt1"/>
+          </a:fontRef>
+        </p:style>
+        <p:txBody>
+          <a:bodyPr rtlCol="0" anchor="ctr" lIns="0" rIns="0" tIns="0" bIns="0"/>
+          <a:lstStyle/>
+          <a:p>
+            <a:pPr algn="ctr"/>
+            <a:r>
+              <a:rPr sz="1050" b="1" lang="ja-JP">
+                <a:solidFill>
+                  <a:srgbClr val="8C450E"/>
+                </a:solidFill>
+                <a:latin typeface="Noto Sans JP"/>
+                <a:ea typeface="Noto Sans JP"/>
+              </a:rPr>
+              <a:t>構想・未実装</a:t>
+            </a:r>
+          </a:p>
+        </p:txBody>
+      </p:sp>
+      <p:sp>
+        <p:nvSpPr>
+          <p:cNvPr id="17" name="Card: 03  節目で撮る">
             <a:extLst>
               <a:ext uri="{C183D7F6-B498-43B3-948B-1728B52AA6E4}">
                 <adec:decorative xmlns:adec="http://schemas.microsoft.com/office/drawing/2017/decorative" val="1"/>
@@ -5733,7 +5843,7 @@
       </p:sp>
       <p:sp>
         <p:nvSpPr>
-          <p:cNvPr id="16" name="Accent: 03  節目で撮る">
+          <p:cNvPr id="18" name="Accent: 03  節目で撮る">
             <a:extLst>
               <a:ext uri="{C183D7F6-B498-43B3-948B-1728B52AA6E4}">
                 <adec:decorative xmlns:adec="http://schemas.microsoft.com/office/drawing/2017/decorative" val="1"/>
@@ -5782,7 +5892,7 @@
       </p:sp>
       <p:sp>
         <p:nvSpPr>
-          <p:cNvPr id="17" name="Text: 03  節目で撮る"/>
+          <p:cNvPr id="19" name="Text: 03  節目で撮る"/>
           <p:cNvSpPr txBox="1"/>
           <p:nvPr/>
         </p:nvSpPr>
@@ -5822,7 +5932,7 @@
       </p:sp>
       <p:sp>
         <p:nvSpPr>
-          <p:cNvPr id="18" name="Text: 作業終了／承認／Hold Point"/>
+          <p:cNvPr id="20" name="Text: 作業終了／承認／Hold Point"/>
           <p:cNvSpPr txBox="1"/>
           <p:nvPr/>
         </p:nvSpPr>
@@ -5862,7 +5972,62 @@
       </p:sp>
       <p:sp>
         <p:nvSpPr>
-          <p:cNvPr id="19" name="Card: 04  三者比較">
+          <p:cNvPr id="21" name="構想・未実装" title="構想・未実装" descr="構想・未実装"/>
+          <p:cNvSpPr/>
+          <p:nvPr/>
+        </p:nvSpPr>
+        <p:spPr>
+          <a:xfrm>
+            <a:off x="10076688" y="2441448"/>
+            <a:ext cx="1481328" cy="237744"/>
+          </a:xfrm>
+          <a:prstGeom prst="roundRect">
+            <a:avLst/>
+          </a:prstGeom>
+          <a:solidFill>
+            <a:srgbClr val="F5E4D4"/>
+          </a:solidFill>
+          <a:ln w="8890">
+            <a:solidFill>
+              <a:srgbClr val="8C450E"/>
+            </a:solidFill>
+          </a:ln>
+        </p:spPr>
+        <p:style>
+          <a:lnRef idx="1">
+            <a:schemeClr val="accent1"/>
+          </a:lnRef>
+          <a:fillRef idx="3">
+            <a:schemeClr val="accent1"/>
+          </a:fillRef>
+          <a:effectRef idx="2">
+            <a:schemeClr val="accent1"/>
+          </a:effectRef>
+          <a:fontRef idx="minor">
+            <a:schemeClr val="lt1"/>
+          </a:fontRef>
+        </p:style>
+        <p:txBody>
+          <a:bodyPr rtlCol="0" anchor="ctr" lIns="0" rIns="0" tIns="0" bIns="0"/>
+          <a:lstStyle/>
+          <a:p>
+            <a:pPr algn="ctr"/>
+            <a:r>
+              <a:rPr sz="1050" b="1" lang="ja-JP">
+                <a:solidFill>
+                  <a:srgbClr val="8C450E"/>
+                </a:solidFill>
+                <a:latin typeface="Noto Sans JP"/>
+                <a:ea typeface="Noto Sans JP"/>
+              </a:rPr>
+              <a:t>構想・未実装</a:t>
+            </a:r>
+          </a:p>
+        </p:txBody>
+      </p:sp>
+      <p:sp>
+        <p:nvSpPr>
+          <p:cNvPr id="22" name="Card: 04  三者比較">
             <a:extLst>
               <a:ext uri="{C183D7F6-B498-43B3-948B-1728B52AA6E4}">
                 <adec:decorative xmlns:adec="http://schemas.microsoft.com/office/drawing/2017/decorative" val="1"/>
@@ -5913,7 +6078,7 @@
       </p:sp>
       <p:sp>
         <p:nvSpPr>
-          <p:cNvPr id="20" name="Accent: 04  三者比較">
+          <p:cNvPr id="23" name="Accent: 04  三者比較">
             <a:extLst>
               <a:ext uri="{C183D7F6-B498-43B3-948B-1728B52AA6E4}">
                 <adec:decorative xmlns:adec="http://schemas.microsoft.com/office/drawing/2017/decorative" val="1"/>
@@ -5962,7 +6127,7 @@
       </p:sp>
       <p:sp>
         <p:nvSpPr>
-          <p:cNvPr id="21" name="Text: 04  三者比較"/>
+          <p:cNvPr id="24" name="Text: 04  三者比較"/>
           <p:cNvSpPr txBox="1"/>
           <p:nvPr/>
         </p:nvSpPr>
@@ -6002,7 +6167,7 @@
       </p:sp>
       <p:sp>
         <p:nvSpPr>
-          <p:cNvPr id="22" name="Text: Plan／Previous／Current"/>
+          <p:cNvPr id="25" name="Text: Plan／Previous／Current"/>
           <p:cNvSpPr txBox="1"/>
           <p:nvPr/>
         </p:nvSpPr>
@@ -6042,7 +6207,62 @@
       </p:sp>
       <p:sp>
         <p:nvSpPr>
-          <p:cNvPr id="23" name="Card: 05  人が判断">
+          <p:cNvPr id="26" name="構想・未実装" title="構想・未実装" descr="構想・未実装"/>
+          <p:cNvSpPr/>
+          <p:nvPr/>
+        </p:nvSpPr>
+        <p:spPr>
+          <a:xfrm>
+            <a:off x="2578608" y="3721607"/>
+            <a:ext cx="1481328" cy="237744"/>
+          </a:xfrm>
+          <a:prstGeom prst="roundRect">
+            <a:avLst/>
+          </a:prstGeom>
+          <a:solidFill>
+            <a:srgbClr val="F5E4D4"/>
+          </a:solidFill>
+          <a:ln w="8890">
+            <a:solidFill>
+              <a:srgbClr val="8C450E"/>
+            </a:solidFill>
+          </a:ln>
+        </p:spPr>
+        <p:style>
+          <a:lnRef idx="1">
+            <a:schemeClr val="accent1"/>
+          </a:lnRef>
+          <a:fillRef idx="3">
+            <a:schemeClr val="accent1"/>
+          </a:fillRef>
+          <a:effectRef idx="2">
+            <a:schemeClr val="accent1"/>
+          </a:effectRef>
+          <a:fontRef idx="minor">
+            <a:schemeClr val="lt1"/>
+          </a:fontRef>
+        </p:style>
+        <p:txBody>
+          <a:bodyPr rtlCol="0" anchor="ctr" lIns="0" rIns="0" tIns="0" bIns="0"/>
+          <a:lstStyle/>
+          <a:p>
+            <a:pPr algn="ctr"/>
+            <a:r>
+              <a:rPr sz="1050" b="1" lang="ja-JP">
+                <a:solidFill>
+                  <a:srgbClr val="8C450E"/>
+                </a:solidFill>
+                <a:latin typeface="Noto Sans JP"/>
+                <a:ea typeface="Noto Sans JP"/>
+              </a:rPr>
+              <a:t>構想・未実装</a:t>
+            </a:r>
+          </a:p>
+        </p:txBody>
+      </p:sp>
+      <p:sp>
+        <p:nvSpPr>
+          <p:cNvPr id="27" name="Card: 05  人が判断">
             <a:extLst>
               <a:ext uri="{C183D7F6-B498-43B3-948B-1728B52AA6E4}">
                 <adec:decorative xmlns:adec="http://schemas.microsoft.com/office/drawing/2017/decorative" val="1"/>
@@ -6093,7 +6313,7 @@
       </p:sp>
       <p:sp>
         <p:nvSpPr>
-          <p:cNvPr id="24" name="Accent: 05  人が判断">
+          <p:cNvPr id="28" name="Accent: 05  人が判断">
             <a:extLst>
               <a:ext uri="{C183D7F6-B498-43B3-948B-1728B52AA6E4}">
                 <adec:decorative xmlns:adec="http://schemas.microsoft.com/office/drawing/2017/decorative" val="1"/>
@@ -6142,7 +6362,7 @@
       </p:sp>
       <p:sp>
         <p:nvSpPr>
-          <p:cNvPr id="25" name="Text: 05  人が判断"/>
+          <p:cNvPr id="29" name="Text: 05  人が判断"/>
           <p:cNvSpPr txBox="1"/>
           <p:nvPr/>
         </p:nvSpPr>
@@ -6182,7 +6402,7 @@
       </p:sp>
       <p:sp>
         <p:nvSpPr>
-          <p:cNvPr id="26" name="Text: 採用／是正／保留／不明"/>
+          <p:cNvPr id="30" name="Text: 採用／是正／保留／不明"/>
           <p:cNvSpPr txBox="1"/>
           <p:nvPr/>
         </p:nvSpPr>
@@ -6222,7 +6442,62 @@
       </p:sp>
       <p:sp>
         <p:nvSpPr>
-          <p:cNvPr id="27" name="Card: 06  渡せる形へ">
+          <p:cNvPr id="31" name="今すぐ試せる·v0.9.0" title="今すぐ試せる·v0.9.0" descr="今すぐ試せる·v0.9.0"/>
+          <p:cNvSpPr/>
+          <p:nvPr/>
+        </p:nvSpPr>
+        <p:spPr>
+          <a:xfrm>
+            <a:off x="6327648" y="3721607"/>
+            <a:ext cx="1481328" cy="237744"/>
+          </a:xfrm>
+          <a:prstGeom prst="roundRect">
+            <a:avLst/>
+          </a:prstGeom>
+          <a:solidFill>
+            <a:srgbClr val="DCEEE4"/>
+          </a:solidFill>
+          <a:ln w="8890">
+            <a:solidFill>
+              <a:srgbClr val="29704A"/>
+            </a:solidFill>
+          </a:ln>
+        </p:spPr>
+        <p:style>
+          <a:lnRef idx="1">
+            <a:schemeClr val="accent1"/>
+          </a:lnRef>
+          <a:fillRef idx="3">
+            <a:schemeClr val="accent1"/>
+          </a:fillRef>
+          <a:effectRef idx="2">
+            <a:schemeClr val="accent1"/>
+          </a:effectRef>
+          <a:fontRef idx="minor">
+            <a:schemeClr val="lt1"/>
+          </a:fontRef>
+        </p:style>
+        <p:txBody>
+          <a:bodyPr rtlCol="0" anchor="ctr" lIns="0" rIns="0" tIns="0" bIns="0"/>
+          <a:lstStyle/>
+          <a:p>
+            <a:pPr algn="ctr"/>
+            <a:r>
+              <a:rPr sz="1050" b="1" lang="ja-JP">
+                <a:solidFill>
+                  <a:srgbClr val="29704A"/>
+                </a:solidFill>
+                <a:latin typeface="Noto Sans JP"/>
+                <a:ea typeface="Noto Sans JP"/>
+              </a:rPr>
+              <a:t>今すぐ試せる·v0.9.0</a:t>
+            </a:r>
+          </a:p>
+        </p:txBody>
+      </p:sp>
+      <p:sp>
+        <p:nvSpPr>
+          <p:cNvPr id="32" name="Card: 06  渡せる形へ">
             <a:extLst>
               <a:ext uri="{C183D7F6-B498-43B3-948B-1728B52AA6E4}">
                 <adec:decorative xmlns:adec="http://schemas.microsoft.com/office/drawing/2017/decorative" val="1"/>
@@ -6273,7 +6548,7 @@
       </p:sp>
       <p:sp>
         <p:nvSpPr>
-          <p:cNvPr id="28" name="Accent: 06  渡せる形へ">
+          <p:cNvPr id="33" name="Accent: 06  渡せる形へ">
             <a:extLst>
               <a:ext uri="{C183D7F6-B498-43B3-948B-1728B52AA6E4}">
                 <adec:decorative xmlns:adec="http://schemas.microsoft.com/office/drawing/2017/decorative" val="1"/>
@@ -6322,7 +6597,7 @@
       </p:sp>
       <p:sp>
         <p:nvSpPr>
-          <p:cNvPr id="29" name="Text: 06  渡せる形へ"/>
+          <p:cNvPr id="34" name="Text: 06  渡せる形へ"/>
           <p:cNvSpPr txBox="1"/>
           <p:nvPr/>
         </p:nvSpPr>
@@ -6362,7 +6637,7 @@
       </p:sp>
       <p:sp>
         <p:nvSpPr>
-          <p:cNvPr id="30" name="Text: report／handoff／archive"/>
+          <p:cNvPr id="35" name="Text: report／handoff／archive"/>
           <p:cNvSpPr txBox="1"/>
           <p:nvPr/>
         </p:nvSpPr>
@@ -6402,7 +6677,62 @@
       </p:sp>
       <p:sp>
         <p:nvSpPr>
-          <p:cNvPr id="31" name="Rounded Rectangle 30">
+          <p:cNvPr id="36" name="今すぐ試せる·v0.9.0" title="今すぐ試せる·v0.9.0" descr="今すぐ試せる·v0.9.0"/>
+          <p:cNvSpPr/>
+          <p:nvPr/>
+        </p:nvSpPr>
+        <p:spPr>
+          <a:xfrm>
+            <a:off x="10076688" y="3721607"/>
+            <a:ext cx="1481328" cy="237744"/>
+          </a:xfrm>
+          <a:prstGeom prst="roundRect">
+            <a:avLst/>
+          </a:prstGeom>
+          <a:solidFill>
+            <a:srgbClr val="DCEEE4"/>
+          </a:solidFill>
+          <a:ln w="8890">
+            <a:solidFill>
+              <a:srgbClr val="29704A"/>
+            </a:solidFill>
+          </a:ln>
+        </p:spPr>
+        <p:style>
+          <a:lnRef idx="1">
+            <a:schemeClr val="accent1"/>
+          </a:lnRef>
+          <a:fillRef idx="3">
+            <a:schemeClr val="accent1"/>
+          </a:fillRef>
+          <a:effectRef idx="2">
+            <a:schemeClr val="accent1"/>
+          </a:effectRef>
+          <a:fontRef idx="minor">
+            <a:schemeClr val="lt1"/>
+          </a:fontRef>
+        </p:style>
+        <p:txBody>
+          <a:bodyPr rtlCol="0" anchor="ctr" lIns="0" rIns="0" tIns="0" bIns="0"/>
+          <a:lstStyle/>
+          <a:p>
+            <a:pPr algn="ctr"/>
+            <a:r>
+              <a:rPr sz="1050" b="1" lang="ja-JP">
+                <a:solidFill>
+                  <a:srgbClr val="29704A"/>
+                </a:solidFill>
+                <a:latin typeface="Noto Sans JP"/>
+                <a:ea typeface="Noto Sans JP"/>
+              </a:rPr>
+              <a:t>今すぐ試せる·v0.9.0</a:t>
+            </a:r>
+          </a:p>
+        </p:txBody>
+      </p:sp>
+      <p:sp>
+        <p:nvSpPr>
+          <p:cNvPr id="37" name="Rounded Rectangle 36">
             <a:extLst>
               <a:ext uri="{C183D7F6-B498-43B3-948B-1728B52AA6E4}">
                 <adec:decorative xmlns:adec="http://schemas.microsoft.com/office/drawing/2017/decorative" val="1"/>
@@ -6453,7 +6783,7 @@
       </p:sp>
       <p:sp>
         <p:nvSpPr>
-          <p:cNvPr id="32" name="Text: 20秒以内"/>
+          <p:cNvPr id="38" name="Text: 20秒以内"/>
           <p:cNvSpPr txBox="1"/>
           <p:nvPr/>
         </p:nvSpPr>
@@ -6493,7 +6823,7 @@
       </p:sp>
       <p:sp>
         <p:nvSpPr>
-          <p:cNvPr id="33" name="Text: Capture能動入力中央値"/>
+          <p:cNvPr id="39" name="Text: Capture能動入力中央値"/>
           <p:cNvSpPr txBox="1"/>
           <p:nvPr/>
         </p:nvSpPr>
@@ -6533,7 +6863,7 @@
       </p:sp>
       <p:sp>
         <p:nvSpPr>
-          <p:cNvPr id="34" name="Text: 30秒以内"/>
+          <p:cNvPr id="40" name="Text: 30秒以内"/>
           <p:cNvSpPr txBox="1"/>
           <p:nvPr/>
         </p:nvSpPr>
@@ -6573,7 +6903,7 @@
       </p:sp>
       <p:sp>
         <p:nvSpPr>
-          <p:cNvPr id="35" name="Text: meaningful Commit"/>
+          <p:cNvPr id="41" name="Text: meaningful Commit"/>
           <p:cNvSpPr txBox="1"/>
           <p:nvPr/>
         </p:nvSpPr>
@@ -6613,7 +6943,7 @@
       </p:sp>
       <p:sp>
         <p:nvSpPr>
-          <p:cNvPr id="36" name="Text: 2分以内"/>
+          <p:cNvPr id="42" name="Text: 2分以内"/>
           <p:cNvSpPr txBox="1"/>
           <p:nvPr/>
         </p:nvSpPr>
@@ -6653,7 +6983,7 @@
       </p:sp>
       <p:sp>
         <p:nvSpPr>
-          <p:cNvPr id="37" name="Text: 重要変更の説明・引継ぎ"/>
+          <p:cNvPr id="43" name="Text: 重要変更の説明・引継ぎ"/>
           <p:cNvSpPr txBox="1"/>
           <p:nvPr/>
         </p:nvSpPr>
@@ -6693,7 +7023,7 @@
       </p:sp>
       <p:sp>
         <p:nvSpPr>
-          <p:cNvPr id="38" name="Text: 100%"/>
+          <p:cNvPr id="44" name="Text: 100%"/>
           <p:cNvSpPr txBox="1"/>
           <p:nvPr/>
         </p:nvSpPr>
@@ -6733,7 +7063,7 @@
       </p:sp>
       <p:sp>
         <p:nvSpPr>
-          <p:cNvPr id="39" name="Text: 空store restore成功"/>
+          <p:cNvPr id="45" name="Text: 空store restore成功"/>
           <p:cNvSpPr txBox="1"/>
           <p:nvPr/>
         </p:nvSpPr>
@@ -6773,7 +7103,7 @@
       </p:sp>
       <p:sp>
         <p:nvSpPr>
-          <p:cNvPr id="40" name="Text: すべてPilot UX／受入目標。実績値ではあり"/>
+          <p:cNvPr id="46" name="Text: すべてPilot UX／受入目標。実績値ではあり"/>
           <p:cNvSpPr txBox="1"/>
           <p:nvPr/>
         </p:nvSpPr>
@@ -6813,7 +7143,7 @@
       </p:sp>
       <p:cxnSp>
         <p:nvCxnSpPr>
-          <p:cNvPr id="41" name="Connector 40">
+          <p:cNvPr id="47" name="Connector 46">
             <a:extLst>
               <a:ext uri="{C183D7F6-B498-43B3-948B-1728B52AA6E4}">
                 <adec:decorative xmlns:adec="http://schemas.microsoft.com/office/drawing/2017/decorative" val="1"/>
@@ -6854,7 +7184,7 @@
       </p:cxnSp>
       <p:sp>
         <p:nvSpPr>
-          <p:cNvPr id="42" name="Text: Concept · v0.9.0 · 確認日 2"/>
+          <p:cNvPr id="48" name="Text: Concept · v0.9.0 · 確認日 2"/>
           <p:cNvSpPr txBox="1"/>
           <p:nvPr/>
         </p:nvSpPr>
@@ -6895,7 +7225,7 @@
       </p:sp>
       <p:sp>
         <p:nvSpPr>
-          <p:cNvPr id="43" name="Text: Core concept §15 · Stage"/>
+          <p:cNvPr id="49" name="Text: Core concept §15 · Stage"/>
           <p:cNvSpPr txBox="1"/>
           <p:nvPr/>
         </p:nvSpPr>
@@ -6935,7 +7265,7 @@
       </p:sp>
       <p:sp>
         <p:nvSpPr>
-          <p:cNvPr id="44" name="Text: 10"/>
+          <p:cNvPr id="50" name="Text: 10"/>
           <p:cNvSpPr txBox="1"/>
           <p:nvPr/>
         </p:nvSpPr>
@@ -8785,7 +9115,7 @@
       </p:sp>
       <p:sp>
         <p:nvSpPr>
-          <p:cNvPr id="37" name="Text: リンク先はGitHub v0.9.0 tag。t"/>
+          <p:cNvPr id="37" name="Text: リンク先はGitHub v0.9.0 tagの固"/>
           <p:cNvSpPr txBox="1"/>
           <p:nvPr/>
         </p:nvSpPr>
@@ -8818,7 +9148,7 @@
                 <a:latin typeface="Noto Sans JP"/>
                 <a:ea typeface="Noto Sans JP"/>
               </a:rPr>
-              <a:t>リンク先はGitHub v0.9.0 tag。tag公開後に有効です。</a:t>
+              <a:t>リンク先はGitHub v0.9.0 tagの固定内容。</a:t>
             </a:r>
           </a:p>
         </p:txBody>
@@ -10948,7 +11278,7 @@
         <p:spPr>
           <a:xfrm>
             <a:off x="694944" y="2514600"/>
-            <a:ext cx="1325880" cy="310896"/>
+            <a:ext cx="1325880" cy="429768"/>
           </a:xfrm>
           <a:prstGeom prst="rect">
             <a:avLst/>
@@ -11079,7 +11409,7 @@
         <p:spPr>
           <a:xfrm>
             <a:off x="2551176" y="2514600"/>
-            <a:ext cx="1325880" cy="310896"/>
+            <a:ext cx="1325880" cy="429768"/>
           </a:xfrm>
           <a:prstGeom prst="rect">
             <a:avLst/>
@@ -11210,7 +11540,7 @@
         <p:spPr>
           <a:xfrm>
             <a:off x="4407407" y="2514600"/>
-            <a:ext cx="1325880" cy="310896"/>
+            <a:ext cx="1325880" cy="429768"/>
           </a:xfrm>
           <a:prstGeom prst="rect">
             <a:avLst/>
@@ -11342,7 +11672,7 @@
         <p:spPr>
           <a:xfrm>
             <a:off x="6263640" y="2514600"/>
-            <a:ext cx="1325880" cy="310896"/>
+            <a:ext cx="1325880" cy="429768"/>
           </a:xfrm>
           <a:prstGeom prst="rect">
             <a:avLst/>
@@ -11473,7 +11803,7 @@
         <p:spPr>
           <a:xfrm>
             <a:off x="8119871" y="2514600"/>
-            <a:ext cx="1325880" cy="310896"/>
+            <a:ext cx="1325880" cy="429768"/>
           </a:xfrm>
           <a:prstGeom prst="rect">
             <a:avLst/>
@@ -11604,7 +11934,7 @@
         <p:spPr>
           <a:xfrm>
             <a:off x="9976103" y="2514600"/>
-            <a:ext cx="1325880" cy="310896"/>
+            <a:ext cx="1325880" cy="429768"/>
           </a:xfrm>
           <a:prstGeom prst="rect">
             <a:avLst/>
@@ -12893,8 +13223,8 @@
         </p:nvSpPr>
         <p:spPr>
           <a:xfrm>
-            <a:off x="621792" y="1536192"/>
-            <a:ext cx="2194560" cy="960120"/>
+            <a:off x="621792" y="1600200"/>
+            <a:ext cx="2304288" cy="1097280"/>
           </a:xfrm>
           <a:prstGeom prst="roundRect">
             <a:avLst/>
@@ -12938,8 +13268,8 @@
         </p:nvSpPr>
         <p:spPr>
           <a:xfrm>
-            <a:off x="731520" y="1664207"/>
-            <a:ext cx="1975104" cy="329184"/>
+            <a:off x="731520" y="1728216"/>
+            <a:ext cx="2084832" cy="329184"/>
           </a:xfrm>
           <a:prstGeom prst="rect">
             <a:avLst/>
@@ -12978,8 +13308,8 @@
         </p:nvSpPr>
         <p:spPr>
           <a:xfrm>
-            <a:off x="713232" y="2039112"/>
-            <a:ext cx="2011679" cy="310896"/>
+            <a:off x="713232" y="2103120"/>
+            <a:ext cx="2121408" cy="502919"/>
           </a:xfrm>
           <a:prstGeom prst="rect">
             <a:avLst/>
@@ -13024,8 +13354,8 @@
         </p:nvSpPr>
         <p:spPr>
           <a:xfrm>
-            <a:off x="3017520" y="1536192"/>
-            <a:ext cx="2194560" cy="960120"/>
+            <a:off x="3017520" y="1600200"/>
+            <a:ext cx="2304288" cy="1097280"/>
           </a:xfrm>
           <a:prstGeom prst="roundRect">
             <a:avLst/>
@@ -13069,8 +13399,8 @@
         </p:nvSpPr>
         <p:spPr>
           <a:xfrm>
-            <a:off x="3127248" y="1664207"/>
-            <a:ext cx="1975104" cy="329184"/>
+            <a:off x="3127248" y="1728216"/>
+            <a:ext cx="2084832" cy="329184"/>
           </a:xfrm>
           <a:prstGeom prst="rect">
             <a:avLst/>
@@ -13109,8 +13439,8 @@
         </p:nvSpPr>
         <p:spPr>
           <a:xfrm>
-            <a:off x="3108960" y="2039112"/>
-            <a:ext cx="2011679" cy="310896"/>
+            <a:off x="3108960" y="2103120"/>
+            <a:ext cx="2121408" cy="502919"/>
           </a:xfrm>
           <a:prstGeom prst="rect">
             <a:avLst/>
@@ -13155,8 +13485,8 @@
         </p:nvSpPr>
         <p:spPr>
           <a:xfrm>
-            <a:off x="5413248" y="1536192"/>
-            <a:ext cx="2194560" cy="960120"/>
+            <a:off x="5413248" y="1600200"/>
+            <a:ext cx="2304288" cy="1097280"/>
           </a:xfrm>
           <a:prstGeom prst="roundRect">
             <a:avLst/>
@@ -13200,8 +13530,8 @@
         </p:nvSpPr>
         <p:spPr>
           <a:xfrm>
-            <a:off x="5522976" y="1664207"/>
-            <a:ext cx="1975104" cy="329184"/>
+            <a:off x="5522976" y="1728216"/>
+            <a:ext cx="2084832" cy="329184"/>
           </a:xfrm>
           <a:prstGeom prst="rect">
             <a:avLst/>
@@ -13240,8 +13570,8 @@
         </p:nvSpPr>
         <p:spPr>
           <a:xfrm>
-            <a:off x="5504688" y="2039112"/>
-            <a:ext cx="2011679" cy="310896"/>
+            <a:off x="5504688" y="2103120"/>
+            <a:ext cx="2121408" cy="502919"/>
           </a:xfrm>
           <a:prstGeom prst="rect">
             <a:avLst/>
@@ -13297,8 +13627,8 @@
         </p:nvSpPr>
         <p:spPr>
           <a:xfrm>
-            <a:off x="1581912" y="2578608"/>
-            <a:ext cx="274320" cy="384048"/>
+            <a:off x="1636776" y="2724912"/>
+            <a:ext cx="274320" cy="310896"/>
           </a:xfrm>
           <a:prstGeom prst="chevron">
             <a:avLst/>
@@ -13346,8 +13676,8 @@
         </p:nvSpPr>
         <p:spPr>
           <a:xfrm>
-            <a:off x="3977640" y="2578608"/>
-            <a:ext cx="274320" cy="384048"/>
+            <a:off x="4032504" y="2724912"/>
+            <a:ext cx="274320" cy="310896"/>
           </a:xfrm>
           <a:prstGeom prst="chevron">
             <a:avLst/>
@@ -13395,8 +13725,8 @@
         </p:nvSpPr>
         <p:spPr>
           <a:xfrm>
-            <a:off x="6373368" y="2578608"/>
-            <a:ext cx="274320" cy="384048"/>
+            <a:off x="6428232" y="2724912"/>
+            <a:ext cx="274320" cy="310896"/>
           </a:xfrm>
           <a:prstGeom prst="chevron">
             <a:avLst/>
@@ -13444,8 +13774,8 @@
         </p:nvSpPr>
         <p:spPr>
           <a:xfrm>
-            <a:off x="621792" y="3054096"/>
-            <a:ext cx="2194560" cy="914400"/>
+            <a:off x="621792" y="3090672"/>
+            <a:ext cx="2194560" cy="1051560"/>
           </a:xfrm>
           <a:prstGeom prst="roundRect">
             <a:avLst/>
@@ -13489,7 +13819,7 @@
         </p:nvSpPr>
         <p:spPr>
           <a:xfrm>
-            <a:off x="731520" y="3182112"/>
+            <a:off x="731520" y="3218688"/>
             <a:ext cx="1975104" cy="329184"/>
           </a:xfrm>
           <a:prstGeom prst="rect">
@@ -13529,8 +13859,8 @@
         </p:nvSpPr>
         <p:spPr>
           <a:xfrm>
-            <a:off x="713232" y="3557015"/>
-            <a:ext cx="2011679" cy="310896"/>
+            <a:off x="713232" y="3593591"/>
+            <a:ext cx="2011679" cy="457199"/>
           </a:xfrm>
           <a:prstGeom prst="rect">
             <a:avLst/>
@@ -13586,8 +13916,8 @@
         </p:nvSpPr>
         <p:spPr>
           <a:xfrm>
-            <a:off x="2926080" y="3401568"/>
-            <a:ext cx="310896" cy="420624"/>
+            <a:off x="2926080" y="3429000"/>
+            <a:ext cx="310896" cy="384048"/>
           </a:xfrm>
           <a:prstGeom prst="chevron">
             <a:avLst/>
@@ -13635,8 +13965,8 @@
         </p:nvSpPr>
         <p:spPr>
           <a:xfrm>
-            <a:off x="3291840" y="3054096"/>
-            <a:ext cx="2615184" cy="914400"/>
+            <a:off x="3291840" y="3090672"/>
+            <a:ext cx="2615184" cy="1051560"/>
           </a:xfrm>
           <a:prstGeom prst="roundRect">
             <a:avLst/>
@@ -13681,7 +14011,7 @@
         </p:nvSpPr>
         <p:spPr>
           <a:xfrm>
-            <a:off x="3401568" y="3182112"/>
+            <a:off x="3401568" y="3218688"/>
             <a:ext cx="2395728" cy="329184"/>
           </a:xfrm>
           <a:prstGeom prst="rect">
@@ -13721,8 +14051,8 @@
         </p:nvSpPr>
         <p:spPr>
           <a:xfrm>
-            <a:off x="3383280" y="3557015"/>
-            <a:ext cx="2432303" cy="310896"/>
+            <a:off x="3383280" y="3593591"/>
+            <a:ext cx="2432303" cy="457199"/>
           </a:xfrm>
           <a:prstGeom prst="rect">
             <a:avLst/>
@@ -13778,8 +14108,8 @@
         </p:nvSpPr>
         <p:spPr>
           <a:xfrm>
-            <a:off x="6016752" y="3401568"/>
-            <a:ext cx="310896" cy="420624"/>
+            <a:off x="6016752" y="3429000"/>
+            <a:ext cx="310896" cy="384048"/>
           </a:xfrm>
           <a:prstGeom prst="chevron">
             <a:avLst/>
@@ -13821,8 +14151,8 @@
         </p:nvSpPr>
         <p:spPr>
           <a:xfrm>
-            <a:off x="6455664" y="2962656"/>
-            <a:ext cx="1920240" cy="1097280"/>
+            <a:off x="6455664" y="3090672"/>
+            <a:ext cx="1920240" cy="1051560"/>
           </a:xfrm>
           <a:prstGeom prst="hexagon">
             <a:avLst/>
@@ -13866,8 +14196,8 @@
         </p:nvSpPr>
         <p:spPr>
           <a:xfrm>
-            <a:off x="6583680" y="3145536"/>
-            <a:ext cx="1664208" cy="310896"/>
+            <a:off x="6583680" y="3236976"/>
+            <a:ext cx="1664208" cy="274320"/>
           </a:xfrm>
           <a:prstGeom prst="rect">
             <a:avLst/>
@@ -13906,8 +14236,8 @@
         </p:nvSpPr>
         <p:spPr>
           <a:xfrm>
-            <a:off x="6583680" y="3474720"/>
-            <a:ext cx="1664208" cy="512064"/>
+            <a:off x="6583680" y="3566160"/>
+            <a:ext cx="1664208" cy="457200"/>
           </a:xfrm>
           <a:prstGeom prst="rect">
             <a:avLst/>
@@ -13952,8 +14282,8 @@
         </p:nvSpPr>
         <p:spPr>
           <a:xfrm>
-            <a:off x="8503920" y="3401568"/>
-            <a:ext cx="310896" cy="420624"/>
+            <a:off x="8503920" y="3429000"/>
+            <a:ext cx="310896" cy="384048"/>
           </a:xfrm>
           <a:prstGeom prst="chevron">
             <a:avLst/>
@@ -14001,8 +14331,8 @@
         </p:nvSpPr>
         <p:spPr>
           <a:xfrm>
-            <a:off x="8961120" y="1536192"/>
-            <a:ext cx="2615184" cy="932688"/>
+            <a:off x="8961120" y="1600200"/>
+            <a:ext cx="2615184" cy="868680"/>
           </a:xfrm>
           <a:prstGeom prst="roundRect">
             <a:avLst/>
@@ -14052,8 +14382,8 @@
         </p:nvSpPr>
         <p:spPr>
           <a:xfrm>
-            <a:off x="9125712" y="1700784"/>
-            <a:ext cx="128016" cy="603504"/>
+            <a:off x="9125712" y="1764792"/>
+            <a:ext cx="128016" cy="539496"/>
           </a:xfrm>
           <a:prstGeom prst="roundRect">
             <a:avLst/>
@@ -14095,7 +14425,7 @@
         </p:nvSpPr>
         <p:spPr>
           <a:xfrm>
-            <a:off x="9400032" y="1664207"/>
+            <a:off x="9400032" y="1728216"/>
             <a:ext cx="1993391" cy="347472"/>
           </a:xfrm>
           <a:prstGeom prst="rect">
@@ -14135,7 +14465,7 @@
         </p:nvSpPr>
         <p:spPr>
           <a:xfrm>
-            <a:off x="9400032" y="2066543"/>
+            <a:off x="9400032" y="2130552"/>
             <a:ext cx="1993391" cy="310896"/>
           </a:xfrm>
           <a:prstGeom prst="rect">
@@ -14181,8 +14511,8 @@
         </p:nvSpPr>
         <p:spPr>
           <a:xfrm>
-            <a:off x="8961120" y="2633472"/>
-            <a:ext cx="2615184" cy="932688"/>
+            <a:off x="8961120" y="2578608"/>
+            <a:ext cx="2615184" cy="868680"/>
           </a:xfrm>
           <a:prstGeom prst="roundRect">
             <a:avLst/>
@@ -14232,8 +14562,8 @@
         </p:nvSpPr>
         <p:spPr>
           <a:xfrm>
-            <a:off x="9125712" y="2798064"/>
-            <a:ext cx="128016" cy="603504"/>
+            <a:off x="9125712" y="2743200"/>
+            <a:ext cx="128016" cy="539496"/>
           </a:xfrm>
           <a:prstGeom prst="roundRect">
             <a:avLst/>
@@ -14275,7 +14605,7 @@
         </p:nvSpPr>
         <p:spPr>
           <a:xfrm>
-            <a:off x="9400032" y="2761488"/>
+            <a:off x="9400032" y="2706624"/>
             <a:ext cx="1993391" cy="347472"/>
           </a:xfrm>
           <a:prstGeom prst="rect">
@@ -14315,7 +14645,7 @@
         </p:nvSpPr>
         <p:spPr>
           <a:xfrm>
-            <a:off x="9400032" y="3163824"/>
+            <a:off x="9400032" y="3108960"/>
             <a:ext cx="1993391" cy="310896"/>
           </a:xfrm>
           <a:prstGeom prst="rect">
@@ -14361,8 +14691,8 @@
         </p:nvSpPr>
         <p:spPr>
           <a:xfrm>
-            <a:off x="8961120" y="3730752"/>
-            <a:ext cx="2615184" cy="932688"/>
+            <a:off x="8961120" y="3557016"/>
+            <a:ext cx="2615184" cy="868680"/>
           </a:xfrm>
           <a:prstGeom prst="roundRect">
             <a:avLst/>
@@ -14412,8 +14742,8 @@
         </p:nvSpPr>
         <p:spPr>
           <a:xfrm>
-            <a:off x="9125712" y="3895344"/>
-            <a:ext cx="128016" cy="603504"/>
+            <a:off x="9125712" y="3721608"/>
+            <a:ext cx="128016" cy="539496"/>
           </a:xfrm>
           <a:prstGeom prst="roundRect">
             <a:avLst/>
@@ -14455,7 +14785,7 @@
         </p:nvSpPr>
         <p:spPr>
           <a:xfrm>
-            <a:off x="9400032" y="3858768"/>
+            <a:off x="9400032" y="3685032"/>
             <a:ext cx="1993391" cy="347472"/>
           </a:xfrm>
           <a:prstGeom prst="rect">
@@ -14489,13 +14819,13 @@
       </p:sp>
       <p:sp>
         <p:nvSpPr>
-          <p:cNvPr id="41" name="Text: synapse-present&#10;ローカル生成のみ"/>
+          <p:cNvPr id="41" name="Text: ローカル生成のみ"/>
           <p:cNvSpPr txBox="1"/>
           <p:nvPr/>
         </p:nvSpPr>
         <p:spPr>
           <a:xfrm>
-            <a:off x="9400032" y="4261104"/>
+            <a:off x="9400032" y="4087368"/>
             <a:ext cx="1993391" cy="310896"/>
           </a:xfrm>
           <a:prstGeom prst="rect">
@@ -14514,17 +14844,6 @@
                 <a:spcPts val="0"/>
               </a:spcAft>
             </a:pPr>
-            <a:r>
-              <a:rPr sz="1400" b="0" lang="ja-JP">
-                <a:solidFill>
-                  <a:srgbClr val="13202B"/>
-                </a:solidFill>
-                <a:latin typeface="Noto Sans JP"/>
-                <a:ea typeface="Noto Sans JP"/>
-              </a:rPr>
-              <a:t>synapse-present</a:t>
-            </a:r>
-            <a:br/>
             <a:r>
               <a:rPr sz="1400" b="0" lang="ja-JP">
                 <a:solidFill>
@@ -14552,8 +14871,8 @@
         </p:nvCxnSpPr>
         <p:spPr>
           <a:xfrm flipV="1">
-            <a:off x="8412480" y="2002536"/>
-            <a:ext cx="548640" cy="1508760"/>
+            <a:off x="8375904" y="2034540"/>
+            <a:ext cx="585216" cy="1581912"/>
           </a:xfrm>
           <a:prstGeom prst="line">
             <a:avLst/>
@@ -14593,8 +14912,8 @@
         </p:nvCxnSpPr>
         <p:spPr>
           <a:xfrm flipV="1">
-            <a:off x="8412480" y="3099816"/>
-            <a:ext cx="548640" cy="411480"/>
+            <a:off x="8375904" y="3012948"/>
+            <a:ext cx="585216" cy="603504"/>
           </a:xfrm>
           <a:prstGeom prst="line">
             <a:avLst/>
@@ -14634,8 +14953,8 @@
         </p:nvCxnSpPr>
         <p:spPr>
           <a:xfrm>
-            <a:off x="8412480" y="3511296"/>
-            <a:ext cx="548640" cy="685800"/>
+            <a:off x="8375904" y="3616452"/>
+            <a:ext cx="585216" cy="374904"/>
           </a:xfrm>
           <a:prstGeom prst="line">
             <a:avLst/>
@@ -14675,8 +14994,8 @@
         </p:nvSpPr>
         <p:spPr>
           <a:xfrm>
-            <a:off x="621792" y="4279392"/>
-            <a:ext cx="10972800" cy="1207008"/>
+            <a:off x="621792" y="4526280"/>
+            <a:ext cx="10972800" cy="914400"/>
           </a:xfrm>
           <a:prstGeom prst="roundRect">
             <a:avLst/>
@@ -14720,8 +15039,8 @@
         </p:nvSpPr>
         <p:spPr>
           <a:xfrm>
-            <a:off x="841248" y="4389120"/>
-            <a:ext cx="10515600" cy="1005840"/>
+            <a:off x="841248" y="4617720"/>
+            <a:ext cx="10515600" cy="768096"/>
           </a:xfrm>
           <a:prstGeom prst="rect">
             <a:avLst/>
@@ -14736,7 +15055,7 @@
           <a:p>
             <a:pPr algn="l"/>
             <a:r>
-              <a:rPr sz="1300" b="1" lang="ja-JP">
+              <a:rPr sz="1250" b="1" lang="ja-JP">
                 <a:solidFill>
                   <a:srgbClr val="8C4A12"/>
                 </a:solidFill>
@@ -14746,7 +15065,7 @@
               <a:t>候補は誰が用意する？　</a:t>
             </a:r>
             <a:r>
-              <a:rPr sz="1300" b="0" lang="ja-JP">
+              <a:rPr sz="1250" b="0" lang="ja-JP">
                 <a:solidFill>
                   <a:srgbClr val="13202B"/>
                 </a:solidFill>
@@ -14757,7 +15076,7 @@
 </a:t>
             </a:r>
             <a:r>
-              <a:rPr sz="1300" b="1" lang="ja-JP">
+              <a:rPr sz="1250" b="1" lang="ja-JP">
                 <a:solidFill>
                   <a:srgbClr val="8C4A12"/>
                 </a:solidFill>
@@ -14767,7 +15086,7 @@
               <a:t>誰が決める？　</a:t>
             </a:r>
             <a:r>
-              <a:rPr sz="1300" b="0" lang="ja-JP">
+              <a:rPr sz="1250" b="0" lang="ja-JP">
                 <a:solidFill>
                   <a:srgbClr val="13202B"/>
                 </a:solidFill>
@@ -14778,7 +15097,7 @@
 </a:t>
             </a:r>
             <a:r>
-              <a:rPr sz="1300" b="1" lang="ja-JP">
+              <a:rPr sz="1250" b="1" lang="ja-JP">
                 <a:solidFill>
                   <a:srgbClr val="8C4A12"/>
                 </a:solidFill>
@@ -14788,7 +15107,7 @@
               <a:t>何を比較する？　</a:t>
             </a:r>
             <a:r>
-              <a:rPr sz="1300" b="0" lang="ja-JP">
+              <a:rPr sz="1250" b="0" lang="ja-JP">
                 <a:solidFill>
                   <a:srgbClr val="13202B"/>
                 </a:solidFill>
@@ -14808,8 +15127,8 @@
         </p:nvSpPr>
         <p:spPr>
           <a:xfrm>
-            <a:off x="658368" y="5577840"/>
-            <a:ext cx="10881360" cy="310896"/>
+            <a:off x="658368" y="5541264"/>
+            <a:ext cx="10881360" cy="274320"/>
           </a:xfrm>
           <a:prstGeom prst="rect">
             <a:avLst/>
@@ -14848,8 +15167,8 @@
         </p:nvSpPr>
         <p:spPr>
           <a:xfrm>
-            <a:off x="658368" y="5907024"/>
-            <a:ext cx="10881360" cy="292608"/>
+            <a:off x="658368" y="5852160"/>
+            <a:ext cx="10881360" cy="256032"/>
           </a:xfrm>
           <a:prstGeom prst="rect">
             <a:avLst/>
@@ -15526,8 +15845,8 @@
         </p:nvSpPr>
         <p:spPr>
           <a:xfrm>
-            <a:off x="4050791" y="2029968"/>
-            <a:ext cx="1508760" cy="475488"/>
+            <a:off x="4050791" y="1975104"/>
+            <a:ext cx="1508760" cy="621792"/>
           </a:xfrm>
           <a:prstGeom prst="rect">
             <a:avLst/>
@@ -16676,9 +16995,293 @@
           </a:p>
         </p:txBody>
       </p:sp>
+      <p:sp>
+        <p:nvSpPr>
+          <p:cNvPr id="35" name="Status: now">
+            <a:extLst>
+              <a:ext uri="{C183D7F6-B498-43B3-948B-1728B52AA6E4}">
+                <adec:decorative xmlns:adec="http://schemas.microsoft.com/office/drawing/2017/decorative" val="1"/>
+              </a:ext>
+            </a:extLst>
+          </p:cNvPr>
+          <p:cNvSpPr/>
+          <p:nvPr/>
+        </p:nvSpPr>
+        <p:spPr>
+          <a:xfrm>
+            <a:off x="621792" y="5577840"/>
+            <a:ext cx="5431536" cy="786384"/>
+          </a:xfrm>
+          <a:prstGeom prst="roundRect">
+            <a:avLst/>
+          </a:prstGeom>
+          <a:solidFill>
+            <a:srgbClr val="DCEEE4"/>
+          </a:solidFill>
+          <a:ln w="12700">
+            <a:solidFill>
+              <a:srgbClr val="29704A"/>
+            </a:solidFill>
+          </a:ln>
+        </p:spPr>
+        <p:style>
+          <a:lnRef idx="1">
+            <a:schemeClr val="accent1"/>
+          </a:lnRef>
+          <a:fillRef idx="3">
+            <a:schemeClr val="accent1"/>
+          </a:fillRef>
+          <a:effectRef idx="2">
+            <a:schemeClr val="accent1"/>
+          </a:effectRef>
+          <a:fontRef idx="minor">
+            <a:schemeClr val="lt1"/>
+          </a:fontRef>
+        </p:style>
+        <p:txBody>
+          <a:bodyPr rtlCol="0" anchor="ctr"/>
+          <a:lstStyle/>
+          <a:p>
+            <a:pPr algn="ctr"/>
+          </a:p>
+        </p:txBody>
+      </p:sp>
+      <p:sp>
+        <p:nvSpPr>
+          <p:cNvPr id="36" name="Status: plan">
+            <a:extLst>
+              <a:ext uri="{C183D7F6-B498-43B3-948B-1728B52AA6E4}">
+                <adec:decorative xmlns:adec="http://schemas.microsoft.com/office/drawing/2017/decorative" val="1"/>
+              </a:ext>
+            </a:extLst>
+          </p:cNvPr>
+          <p:cNvSpPr/>
+          <p:nvPr/>
+        </p:nvSpPr>
+        <p:spPr>
+          <a:xfrm>
+            <a:off x="6163056" y="5577840"/>
+            <a:ext cx="5431536" cy="786384"/>
+          </a:xfrm>
+          <a:prstGeom prst="roundRect">
+            <a:avLst/>
+          </a:prstGeom>
+          <a:solidFill>
+            <a:srgbClr val="F5E4D4"/>
+          </a:solidFill>
+          <a:ln w="12700">
+            <a:solidFill>
+              <a:srgbClr val="8C450E"/>
+            </a:solidFill>
+          </a:ln>
+        </p:spPr>
+        <p:style>
+          <a:lnRef idx="1">
+            <a:schemeClr val="accent1"/>
+          </a:lnRef>
+          <a:fillRef idx="3">
+            <a:schemeClr val="accent1"/>
+          </a:fillRef>
+          <a:effectRef idx="2">
+            <a:schemeClr val="accent1"/>
+          </a:effectRef>
+          <a:fontRef idx="minor">
+            <a:schemeClr val="lt1"/>
+          </a:fontRef>
+        </p:style>
+        <p:txBody>
+          <a:bodyPr rtlCol="0" anchor="ctr"/>
+          <a:lstStyle/>
+          <a:p>
+            <a:pPr algn="ctr"/>
+          </a:p>
+        </p:txBody>
+      </p:sp>
+      <p:sp>
+        <p:nvSpPr>
+          <p:cNvPr id="37" name="Text: 今すぐ試せる（v0.9.0）"/>
+          <p:cNvSpPr txBox="1"/>
+          <p:nvPr/>
+        </p:nvSpPr>
+        <p:spPr>
+          <a:xfrm>
+            <a:off x="768096" y="5632703"/>
+            <a:ext cx="5157216" cy="219456"/>
+          </a:xfrm>
+          <a:prstGeom prst="rect">
+            <a:avLst/>
+          </a:prstGeom>
+          <a:noFill/>
+        </p:spPr>
+        <p:txBody>
+          <a:bodyPr wrap="square" lIns="18288" rIns="18288" tIns="18288" bIns="18288" anchor="t">
+            <a:spAutoFit/>
+          </a:bodyPr>
+          <a:lstStyle/>
+          <a:p>
+            <a:pPr algn="l">
+              <a:spcAft>
+                <a:spcPts val="0"/>
+              </a:spcAft>
+            </a:pPr>
+            <a:r>
+              <a:rPr sz="1200" b="1" lang="ja-JP">
+                <a:solidFill>
+                  <a:srgbClr val="29704A"/>
+                </a:solidFill>
+                <a:latin typeface="Noto Sans JP"/>
+                <a:ea typeface="Noto Sans JP"/>
+              </a:rPr>
+              <a:t>今すぐ試せる（v0.9.0）</a:t>
+            </a:r>
+          </a:p>
+        </p:txBody>
+      </p:sp>
+      <p:sp>
+        <p:nvSpPr>
+          <p:cNvPr id="38" name="Text: 前後の画像と外部で用意した候補を記録し、byte"/>
+          <p:cNvSpPr txBox="1"/>
+          <p:nvPr/>
+        </p:nvSpPr>
+        <p:spPr>
+          <a:xfrm>
+            <a:off x="768096" y="5852159"/>
+            <a:ext cx="5157216" cy="457200"/>
+          </a:xfrm>
+          <a:prstGeom prst="rect">
+            <a:avLst/>
+          </a:prstGeom>
+          <a:noFill/>
+        </p:spPr>
+        <p:txBody>
+          <a:bodyPr wrap="square" lIns="18288" rIns="18288" tIns="18288" bIns="18288" anchor="t">
+            <a:spAutoFit/>
+          </a:bodyPr>
+          <a:lstStyle/>
+          <a:p>
+            <a:pPr algn="l">
+              <a:spcAft>
+                <a:spcPts val="0"/>
+              </a:spcAft>
+            </a:pPr>
+            <a:r>
+              <a:rPr sz="1200" b="0" lang="ja-JP">
+                <a:solidFill>
+                  <a:srgbClr val="13202B"/>
+                </a:solidFill>
+                <a:latin typeface="Noto Sans JP"/>
+                <a:ea typeface="Noto Sans JP"/>
+              </a:rPr>
+              <a:t>前後の画像と外部で用意した候補を記録し、byte identity比較と</a:t>
+            </a:r>
+            <a:br/>
+            <a:r>
+              <a:rPr sz="1200" b="0" lang="ja-JP">
+                <a:solidFill>
+                  <a:srgbClr val="13202B"/>
+                </a:solidFill>
+                <a:latin typeface="Noto Sans JP"/>
+                <a:ea typeface="Noto Sans JP"/>
+              </a:rPr>
+              <a:t>人のAdopt／Reject／Defer＋理由を残す</a:t>
+            </a:r>
+          </a:p>
+        </p:txBody>
+      </p:sp>
+      <p:sp>
+        <p:nvSpPr>
+          <p:cNvPr id="39" name="Text: 構想・未実装"/>
+          <p:cNvSpPr txBox="1"/>
+          <p:nvPr/>
+        </p:nvSpPr>
+        <p:spPr>
+          <a:xfrm>
+            <a:off x="6309360" y="5632703"/>
+            <a:ext cx="5157216" cy="219456"/>
+          </a:xfrm>
+          <a:prstGeom prst="rect">
+            <a:avLst/>
+          </a:prstGeom>
+          <a:noFill/>
+        </p:spPr>
+        <p:txBody>
+          <a:bodyPr wrap="square" lIns="18288" rIns="18288" tIns="18288" bIns="18288" anchor="t">
+            <a:spAutoFit/>
+          </a:bodyPr>
+          <a:lstStyle/>
+          <a:p>
+            <a:pPr algn="l">
+              <a:spcAft>
+                <a:spcPts val="0"/>
+              </a:spcAft>
+            </a:pPr>
+            <a:r>
+              <a:rPr sz="1200" b="1" lang="ja-JP">
+                <a:solidFill>
+                  <a:srgbClr val="8C450E"/>
+                </a:solidFill>
+                <a:latin typeface="Noto Sans JP"/>
+                <a:ea typeface="Noto Sans JP"/>
+              </a:rPr>
+              <a:t>構想・未実装</a:t>
+            </a:r>
+          </a:p>
+        </p:txBody>
+      </p:sp>
+      <p:sp>
+        <p:nvSpPr>
+          <p:cNvPr id="40" name="Text: 撮影(Capture)機能・pixel差分の差分"/>
+          <p:cNvSpPr txBox="1"/>
+          <p:nvPr/>
+        </p:nvSpPr>
+        <p:spPr>
+          <a:xfrm>
+            <a:off x="6309360" y="5852159"/>
+            <a:ext cx="5157216" cy="457200"/>
+          </a:xfrm>
+          <a:prstGeom prst="rect">
+            <a:avLst/>
+          </a:prstGeom>
+          <a:noFill/>
+        </p:spPr>
+        <p:txBody>
+          <a:bodyPr wrap="square" lIns="18288" rIns="18288" tIns="18288" bIns="18288" anchor="t">
+            <a:spAutoFit/>
+          </a:bodyPr>
+          <a:lstStyle/>
+          <a:p>
+            <a:pPr algn="l">
+              <a:spcAft>
+                <a:spcPts val="0"/>
+              </a:spcAft>
+            </a:pPr>
+            <a:r>
+              <a:rPr sz="1200" b="0" lang="ja-JP">
+                <a:solidFill>
+                  <a:srgbClr val="13202B"/>
+                </a:solidFill>
+                <a:latin typeface="Noto Sans JP"/>
+                <a:ea typeface="Noto Sans JP"/>
+              </a:rPr>
+              <a:t>撮影(Capture)機能・pixel差分の差分候補・音声メモ・</a:t>
+            </a:r>
+            <a:br/>
+            <a:r>
+              <a:rPr sz="1200" b="0" lang="ja-JP">
+                <a:solidFill>
+                  <a:srgbClr val="13202B"/>
+                </a:solidFill>
+                <a:latin typeface="Noto Sans JP"/>
+                <a:ea typeface="Noto Sans JP"/>
+              </a:rPr>
+              <a:t>制作process pack</a:t>
+            </a:r>
+          </a:p>
+        </p:txBody>
+      </p:sp>
       <p:cxnSp>
         <p:nvCxnSpPr>
-          <p:cNvPr id="35" name="Connector 34">
+          <p:cNvPr id="41" name="Connector 40">
             <a:extLst>
               <a:ext uri="{C183D7F6-B498-43B3-948B-1728B52AA6E4}">
                 <adec:decorative xmlns:adec="http://schemas.microsoft.com/office/drawing/2017/decorative" val="1"/>
@@ -16719,7 +17322,7 @@
       </p:cxnSp>
       <p:sp>
         <p:nvSpPr>
-          <p:cNvPr id="36" name="Text: Concept · v0.9.0 · 確認日 2"/>
+          <p:cNvPr id="42" name="Text: Concept · v0.9.0 · 確認日 2"/>
           <p:cNvSpPr txBox="1"/>
           <p:nvPr/>
         </p:nvSpPr>
@@ -16760,7 +17363,7 @@
       </p:sp>
       <p:sp>
         <p:nvSpPr>
-          <p:cNvPr id="37" name="Text: Core concept §§14.2, 20."/>
+          <p:cNvPr id="43" name="Text: Core concept §§14.2, 20."/>
           <p:cNvSpPr txBox="1"/>
           <p:nvPr/>
         </p:nvSpPr>
@@ -16793,14 +17396,14 @@
                 <a:latin typeface="Noto Sans JP"/>
                 <a:ea typeface="Noto Sans JP"/>
               </a:rPr>
-              <a:t>Core concept §§14.2, 20.2, 20.7</a:t>
-            </a:r>
-          </a:p>
-        </p:txBody>
-      </p:sp>
-      <p:sp>
-        <p:nvSpPr>
-          <p:cNvPr id="38" name="Text: 05"/>
+              <a:t>Core concept §§14.2, 20.2, 20.7 · project_status.md</a:t>
+            </a:r>
+          </a:p>
+        </p:txBody>
+      </p:sp>
+      <p:sp>
+        <p:nvSpPr>
+          <p:cNvPr id="44" name="Text: 05"/>
           <p:cNvSpPr txBox="1"/>
           <p:nvPr/>
         </p:nvSpPr>
@@ -19001,8 +19604,8 @@
         </p:nvSpPr>
         <p:spPr>
           <a:xfrm>
-            <a:off x="804672" y="5074920"/>
-            <a:ext cx="3310128" cy="438912"/>
+            <a:off x="804672" y="4791456"/>
+            <a:ext cx="3310128" cy="384048"/>
           </a:xfrm>
           <a:prstGeom prst="roundRect">
             <a:avLst/>
@@ -19036,7 +19639,7 @@
           <a:p>
             <a:pPr algn="ctr"/>
             <a:r>
-              <a:rPr sz="1350" b="1" lang="ja-JP">
+              <a:rPr sz="1300" b="1" lang="ja-JP">
                 <a:solidFill>
                   <a:srgbClr val="4E51A8"/>
                 </a:solidFill>
@@ -19056,8 +19659,8 @@
         </p:nvSpPr>
         <p:spPr>
           <a:xfrm>
-            <a:off x="4480559" y="5074920"/>
-            <a:ext cx="3310128" cy="438912"/>
+            <a:off x="4480559" y="4791456"/>
+            <a:ext cx="3310128" cy="384048"/>
           </a:xfrm>
           <a:prstGeom prst="roundRect">
             <a:avLst/>
@@ -19091,7 +19694,7 @@
           <a:p>
             <a:pPr algn="ctr"/>
             <a:r>
-              <a:rPr sz="1350" b="1" lang="ja-JP">
+              <a:rPr sz="1300" b="1" lang="ja-JP">
                 <a:solidFill>
                   <a:srgbClr val="0B6E69"/>
                 </a:solidFill>
@@ -19111,8 +19714,8 @@
         </p:nvSpPr>
         <p:spPr>
           <a:xfrm>
-            <a:off x="8156448" y="5074920"/>
-            <a:ext cx="3310128" cy="438912"/>
+            <a:off x="8156448" y="4791456"/>
+            <a:ext cx="3310128" cy="384048"/>
           </a:xfrm>
           <a:prstGeom prst="roundRect">
             <a:avLst/>
@@ -19146,7 +19749,7 @@
           <a:p>
             <a:pPr algn="ctr"/>
             <a:r>
-              <a:rPr sz="1350" b="1" lang="ja-JP">
+              <a:rPr sz="1300" b="1" lang="ja-JP">
                 <a:solidFill>
                   <a:srgbClr val="29704A"/>
                 </a:solidFill>
@@ -19160,7 +19763,7 @@
       </p:sp>
       <p:sp>
         <p:nvSpPr>
-          <p:cNvPr id="52" name="Rounded Rectangle 51">
+          <p:cNvPr id="52" name="Status: now">
             <a:extLst>
               <a:ext uri="{C183D7F6-B498-43B3-948B-1728B52AA6E4}">
                 <adec:decorative xmlns:adec="http://schemas.microsoft.com/office/drawing/2017/decorative" val="1"/>
@@ -19172,18 +19775,18 @@
         </p:nvSpPr>
         <p:spPr>
           <a:xfrm>
-            <a:off x="804672" y="5696712"/>
-            <a:ext cx="10698480" cy="457200"/>
+            <a:off x="621792" y="5321808"/>
+            <a:ext cx="5431536" cy="960120"/>
           </a:xfrm>
           <a:prstGeom prst="roundRect">
             <a:avLst/>
           </a:prstGeom>
           <a:solidFill>
-            <a:srgbClr val="F5DEDB"/>
+            <a:srgbClr val="DCEEE4"/>
           </a:solidFill>
-          <a:ln w="10160">
+          <a:ln w="12700">
             <a:solidFill>
-              <a:srgbClr val="A13A31"/>
+              <a:srgbClr val="29704A"/>
             </a:solidFill>
           </a:ln>
         </p:spPr>
@@ -19211,14 +19814,65 @@
       </p:sp>
       <p:sp>
         <p:nvSpPr>
-          <p:cNvPr id="53" name="Text: BIM/CADの代替ではない。写真中心の記録は自"/>
+          <p:cNvPr id="53" name="Status: plan">
+            <a:extLst>
+              <a:ext uri="{C183D7F6-B498-43B3-948B-1728B52AA6E4}">
+                <adec:decorative xmlns:adec="http://schemas.microsoft.com/office/drawing/2017/decorative" val="1"/>
+              </a:ext>
+            </a:extLst>
+          </p:cNvPr>
+          <p:cNvSpPr/>
+          <p:nvPr/>
+        </p:nvSpPr>
+        <p:spPr>
+          <a:xfrm>
+            <a:off x="6163056" y="5321808"/>
+            <a:ext cx="5431536" cy="960120"/>
+          </a:xfrm>
+          <a:prstGeom prst="roundRect">
+            <a:avLst/>
+          </a:prstGeom>
+          <a:solidFill>
+            <a:srgbClr val="F5E4D4"/>
+          </a:solidFill>
+          <a:ln w="12700">
+            <a:solidFill>
+              <a:srgbClr val="8C450E"/>
+            </a:solidFill>
+          </a:ln>
+        </p:spPr>
+        <p:style>
+          <a:lnRef idx="1">
+            <a:schemeClr val="accent1"/>
+          </a:lnRef>
+          <a:fillRef idx="3">
+            <a:schemeClr val="accent1"/>
+          </a:fillRef>
+          <a:effectRef idx="2">
+            <a:schemeClr val="accent1"/>
+          </a:effectRef>
+          <a:fontRef idx="minor">
+            <a:schemeClr val="lt1"/>
+          </a:fontRef>
+        </p:style>
+        <p:txBody>
+          <a:bodyPr rtlCol="0" anchor="ctr"/>
+          <a:lstStyle/>
+          <a:p>
+            <a:pPr algn="ctr"/>
+          </a:p>
+        </p:txBody>
+      </p:sp>
+      <p:sp>
+        <p:nvSpPr>
+          <p:cNvPr id="54" name="Text: 今すぐ試せる（v0.9.0）"/>
           <p:cNvSpPr txBox="1"/>
           <p:nvPr/>
         </p:nvSpPr>
         <p:spPr>
           <a:xfrm>
-            <a:off x="960120" y="5769864"/>
-            <a:ext cx="10387584" cy="274320"/>
+            <a:off x="768096" y="5376672"/>
+            <a:ext cx="5157216" cy="219456"/>
           </a:xfrm>
           <a:prstGeom prst="rect">
             <a:avLst/>
@@ -19231,7 +19885,7 @@
           </a:bodyPr>
           <a:lstStyle/>
           <a:p>
-            <a:pPr algn="ctr">
+            <a:pPr algn="l">
               <a:spcAft>
                 <a:spcPts val="0"/>
               </a:spcAft>
@@ -19239,19 +19893,161 @@
             <a:r>
               <a:rPr sz="1200" b="1" lang="ja-JP">
                 <a:solidFill>
-                  <a:srgbClr val="A13A31"/>
-                </a:solidFill>
-                <a:latin typeface="Noto Sans JP"/>
-                <a:ea typeface="Noto Sans JP"/>
-              </a:rPr>
-              <a:t>BIM/CADの代替ではない。写真中心の記録は自動的にAs-built認定せず、確認範囲付きのAs-recordedとして扱う。</a:t>
+                  <a:srgbClr val="29704A"/>
+                </a:solidFill>
+                <a:latin typeface="Noto Sans JP"/>
+                <a:ea typeface="Noto Sans JP"/>
+              </a:rPr>
+              <a:t>今すぐ試せる（v0.9.0）</a:t>
+            </a:r>
+          </a:p>
+        </p:txBody>
+      </p:sp>
+      <p:sp>
+        <p:nvSpPr>
+          <p:cNvPr id="55" name="Text: 3画像（例: 参照・現況・候補）の記録と人の判断"/>
+          <p:cNvSpPr txBox="1"/>
+          <p:nvPr/>
+        </p:nvSpPr>
+        <p:spPr>
+          <a:xfrm>
+            <a:off x="768096" y="5596128"/>
+            <a:ext cx="5157216" cy="630936"/>
+          </a:xfrm>
+          <a:prstGeom prst="rect">
+            <a:avLst/>
+          </a:prstGeom>
+          <a:noFill/>
+        </p:spPr>
+        <p:txBody>
+          <a:bodyPr wrap="square" lIns="18288" rIns="18288" tIns="18288" bIns="18288" anchor="t">
+            <a:spAutoFit/>
+          </a:bodyPr>
+          <a:lstStyle/>
+          <a:p>
+            <a:pPr algn="l">
+              <a:spcAft>
+                <a:spcPts val="0"/>
+              </a:spcAft>
+            </a:pPr>
+            <a:r>
+              <a:rPr sz="1200" b="0" lang="ja-JP">
+                <a:solidFill>
+                  <a:srgbClr val="13202B"/>
+                </a:solidFill>
+                <a:latin typeface="Noto Sans JP"/>
+                <a:ea typeface="Noto Sans JP"/>
+              </a:rPr>
+              <a:t>3画像（例: 参照・現況・候補）の記録と人の判断</a:t>
+            </a:r>
+            <a:br/>
+            <a:r>
+              <a:rPr sz="1200" b="0" lang="ja-JP">
+                <a:solidFill>
+                  <a:srgbClr val="13202B"/>
+                </a:solidFill>
+                <a:latin typeface="Noto Sans JP"/>
+                <a:ea typeface="Noto Sans JP"/>
+              </a:rPr>
+              <a:t>（Plan画像は通常の画像として取り込むだけ）</a:t>
+            </a:r>
+          </a:p>
+        </p:txBody>
+      </p:sp>
+      <p:sp>
+        <p:nvSpPr>
+          <p:cNvPr id="56" name="Text: 構想・未実装"/>
+          <p:cNvSpPr txBox="1"/>
+          <p:nvPr/>
+        </p:nvSpPr>
+        <p:spPr>
+          <a:xfrm>
+            <a:off x="6309360" y="5376672"/>
+            <a:ext cx="5157216" cy="219456"/>
+          </a:xfrm>
+          <a:prstGeom prst="rect">
+            <a:avLst/>
+          </a:prstGeom>
+          <a:noFill/>
+        </p:spPr>
+        <p:txBody>
+          <a:bodyPr wrap="square" lIns="18288" rIns="18288" tIns="18288" bIns="18288" anchor="t">
+            <a:spAutoFit/>
+          </a:bodyPr>
+          <a:lstStyle/>
+          <a:p>
+            <a:pPr algn="l">
+              <a:spcAft>
+                <a:spcPts val="0"/>
+              </a:spcAft>
+            </a:pPr>
+            <a:r>
+              <a:rPr sz="1200" b="1" lang="ja-JP">
+                <a:solidFill>
+                  <a:srgbClr val="8C450E"/>
+                </a:solidFill>
+                <a:latin typeface="Noto Sans JP"/>
+                <a:ea typeface="Noto Sans JP"/>
+              </a:rPr>
+              <a:t>構想・未実装</a:t>
+            </a:r>
+          </a:p>
+        </p:txBody>
+      </p:sp>
+      <p:sp>
+        <p:nvSpPr>
+          <p:cNvPr id="57" name="Text: Plan／Previous／Currentの三者"/>
+          <p:cNvSpPr txBox="1"/>
+          <p:nvPr/>
+        </p:nvSpPr>
+        <p:spPr>
+          <a:xfrm>
+            <a:off x="6309360" y="5596128"/>
+            <a:ext cx="5157216" cy="630936"/>
+          </a:xfrm>
+          <a:prstGeom prst="rect">
+            <a:avLst/>
+          </a:prstGeom>
+          <a:noFill/>
+        </p:spPr>
+        <p:txBody>
+          <a:bodyPr wrap="square" lIns="18288" rIns="18288" tIns="18288" bIns="18288" anchor="t">
+            <a:spAutoFit/>
+          </a:bodyPr>
+          <a:lstStyle/>
+          <a:p>
+            <a:pPr algn="l">
+              <a:spcAft>
+                <a:spcPts val="0"/>
+              </a:spcAft>
+            </a:pPr>
+            <a:r>
+              <a:rPr sz="1200" b="0" lang="ja-JP">
+                <a:solidFill>
+                  <a:srgbClr val="13202B"/>
+                </a:solidFill>
+                <a:latin typeface="Noto Sans JP"/>
+                <a:ea typeface="Noto Sans JP"/>
+              </a:rPr>
+              <a:t>Plan／Previous／Currentの三者比較・計画適合／時間変化の</a:t>
+            </a:r>
+            <a:br/>
+            <a:r>
+              <a:rPr sz="1200" b="0" lang="ja-JP">
+                <a:solidFill>
+                  <a:srgbClr val="13202B"/>
+                </a:solidFill>
+                <a:latin typeface="Noto Sans JP"/>
+                <a:ea typeface="Noto Sans JP"/>
+              </a:rPr>
+              <a:t>自動判定・BIM/CAD連携（As-built自動認定はしない）</a:t>
             </a:r>
           </a:p>
         </p:txBody>
       </p:sp>
       <p:cxnSp>
         <p:nvCxnSpPr>
-          <p:cNvPr id="54" name="Connector 53">
+          <p:cNvPr id="58" name="Connector 57">
             <a:extLst>
               <a:ext uri="{C183D7F6-B498-43B3-948B-1728B52AA6E4}">
                 <adec:decorative xmlns:adec="http://schemas.microsoft.com/office/drawing/2017/decorative" val="1"/>
@@ -19292,7 +20088,7 @@
       </p:cxnSp>
       <p:sp>
         <p:nvSpPr>
-          <p:cNvPr id="55" name="Text: Concept · v0.9.0 · 確認日 2"/>
+          <p:cNvPr id="59" name="Text: Concept · v0.9.0 · 確認日 2"/>
           <p:cNvSpPr txBox="1"/>
           <p:nvPr/>
         </p:nvSpPr>
@@ -19333,7 +20129,7 @@
       </p:sp>
       <p:sp>
         <p:nvSpPr>
-          <p:cNvPr id="56" name="Text: Core concept §§14.1, 14."/>
+          <p:cNvPr id="60" name="Text: Core concept §§14.1, 14."/>
           <p:cNvSpPr txBox="1"/>
           <p:nvPr/>
         </p:nvSpPr>
@@ -19366,14 +20162,14 @@
                 <a:latin typeface="Noto Sans JP"/>
                 <a:ea typeface="Noto Sans JP"/>
               </a:rPr>
-              <a:t>Core concept §§14.1, 14.3, 20.2</a:t>
-            </a:r>
-          </a:p>
-        </p:txBody>
-      </p:sp>
-      <p:sp>
-        <p:nvSpPr>
-          <p:cNvPr id="57" name="Text: 06"/>
+              <a:t>Core concept §§14.1, 14.3, 20.2 · project_status.md</a:t>
+            </a:r>
+          </a:p>
+        </p:txBody>
+      </p:sp>
+      <p:sp>
+        <p:nvSpPr>
+          <p:cNvPr id="61" name="Text: 06"/>
           <p:cNvSpPr txBox="1"/>
           <p:nvPr/>
         </p:nvSpPr>
@@ -21346,14 +22142,116 @@
       </p:sp>
       <p:sp>
         <p:nvSpPr>
-          <p:cNvPr id="44" name="Text: 契約適合や施工品質を自動証明しない。後任が判断で"/>
+          <p:cNvPr id="44" name="Status: now">
+            <a:extLst>
+              <a:ext uri="{C183D7F6-B498-43B3-948B-1728B52AA6E4}">
+                <adec:decorative xmlns:adec="http://schemas.microsoft.com/office/drawing/2017/decorative" val="1"/>
+              </a:ext>
+            </a:extLst>
+          </p:cNvPr>
+          <p:cNvSpPr/>
+          <p:nvPr/>
+        </p:nvSpPr>
+        <p:spPr>
+          <a:xfrm>
+            <a:off x="621792" y="5577840"/>
+            <a:ext cx="5431536" cy="786384"/>
+          </a:xfrm>
+          <a:prstGeom prst="roundRect">
+            <a:avLst/>
+          </a:prstGeom>
+          <a:solidFill>
+            <a:srgbClr val="DCEEE4"/>
+          </a:solidFill>
+          <a:ln w="12700">
+            <a:solidFill>
+              <a:srgbClr val="29704A"/>
+            </a:solidFill>
+          </a:ln>
+        </p:spPr>
+        <p:style>
+          <a:lnRef idx="1">
+            <a:schemeClr val="accent1"/>
+          </a:lnRef>
+          <a:fillRef idx="3">
+            <a:schemeClr val="accent1"/>
+          </a:fillRef>
+          <a:effectRef idx="2">
+            <a:schemeClr val="accent1"/>
+          </a:effectRef>
+          <a:fontRef idx="minor">
+            <a:schemeClr val="lt1"/>
+          </a:fontRef>
+        </p:style>
+        <p:txBody>
+          <a:bodyPr rtlCol="0" anchor="ctr"/>
+          <a:lstStyle/>
+          <a:p>
+            <a:pPr algn="ctr"/>
+          </a:p>
+        </p:txBody>
+      </p:sp>
+      <p:sp>
+        <p:nvSpPr>
+          <p:cNvPr id="45" name="Status: plan">
+            <a:extLst>
+              <a:ext uri="{C183D7F6-B498-43B3-948B-1728B52AA6E4}">
+                <adec:decorative xmlns:adec="http://schemas.microsoft.com/office/drawing/2017/decorative" val="1"/>
+              </a:ext>
+            </a:extLst>
+          </p:cNvPr>
+          <p:cNvSpPr/>
+          <p:nvPr/>
+        </p:nvSpPr>
+        <p:spPr>
+          <a:xfrm>
+            <a:off x="6163056" y="5577840"/>
+            <a:ext cx="5431536" cy="786384"/>
+          </a:xfrm>
+          <a:prstGeom prst="roundRect">
+            <a:avLst/>
+          </a:prstGeom>
+          <a:solidFill>
+            <a:srgbClr val="F5E4D4"/>
+          </a:solidFill>
+          <a:ln w="12700">
+            <a:solidFill>
+              <a:srgbClr val="8C450E"/>
+            </a:solidFill>
+          </a:ln>
+        </p:spPr>
+        <p:style>
+          <a:lnRef idx="1">
+            <a:schemeClr val="accent1"/>
+          </a:lnRef>
+          <a:fillRef idx="3">
+            <a:schemeClr val="accent1"/>
+          </a:fillRef>
+          <a:effectRef idx="2">
+            <a:schemeClr val="accent1"/>
+          </a:effectRef>
+          <a:fontRef idx="minor">
+            <a:schemeClr val="lt1"/>
+          </a:fontRef>
+        </p:style>
+        <p:txBody>
+          <a:bodyPr rtlCol="0" anchor="ctr"/>
+          <a:lstStyle/>
+          <a:p>
+            <a:pPr algn="ctr"/>
+          </a:p>
+        </p:txBody>
+      </p:sp>
+      <p:sp>
+        <p:nvSpPr>
+          <p:cNvPr id="46" name="Text: 今すぐ試せる（v0.9.0）"/>
           <p:cNvSpPr txBox="1"/>
           <p:nvPr/>
         </p:nvSpPr>
         <p:spPr>
           <a:xfrm>
-            <a:off x="960120" y="5797296"/>
-            <a:ext cx="10287000" cy="329184"/>
+            <a:off x="768096" y="5632703"/>
+            <a:ext cx="5157216" cy="219456"/>
           </a:xfrm>
           <a:prstGeom prst="rect">
             <a:avLst/>
@@ -21366,27 +22264,169 @@
           </a:bodyPr>
           <a:lstStyle/>
           <a:p>
-            <a:pPr algn="ctr">
+            <a:pPr algn="l">
               <a:spcAft>
                 <a:spcPts val="0"/>
               </a:spcAft>
             </a:pPr>
             <a:r>
-              <a:rPr sz="1300" b="0" lang="ja-JP">
-                <a:solidFill>
-                  <a:srgbClr val="5E6873"/>
-                </a:solidFill>
-                <a:latin typeface="Noto Sans JP"/>
-                <a:ea typeface="Noto Sans JP"/>
-              </a:rPr>
-              <a:t>契約適合や施工品質を自動証明しない。後任が判断できるEvidenceと、誰が何を確認したかを渡す。</a:t>
+              <a:rPr sz="1200" b="1" lang="ja-JP">
+                <a:solidFill>
+                  <a:srgbClr val="29704A"/>
+                </a:solidFill>
+                <a:latin typeface="Noto Sans JP"/>
+                <a:ea typeface="Noto Sans JP"/>
+              </a:rPr>
+              <a:t>今すぐ試せる（v0.9.0）</a:t>
+            </a:r>
+          </a:p>
+        </p:txBody>
+      </p:sp>
+      <p:sp>
+        <p:nvSpPr>
+          <p:cNvPr id="47" name="Text: 処置前後の画像と候補の記録・人の判断、archi"/>
+          <p:cNvSpPr txBox="1"/>
+          <p:nvPr/>
+        </p:nvSpPr>
+        <p:spPr>
+          <a:xfrm>
+            <a:off x="768096" y="5852159"/>
+            <a:ext cx="5157216" cy="457200"/>
+          </a:xfrm>
+          <a:prstGeom prst="rect">
+            <a:avLst/>
+          </a:prstGeom>
+          <a:noFill/>
+        </p:spPr>
+        <p:txBody>
+          <a:bodyPr wrap="square" lIns="18288" rIns="18288" tIns="18288" bIns="18288" anchor="t">
+            <a:spAutoFit/>
+          </a:bodyPr>
+          <a:lstStyle/>
+          <a:p>
+            <a:pPr algn="l">
+              <a:spcAft>
+                <a:spcPts val="0"/>
+              </a:spcAft>
+            </a:pPr>
+            <a:r>
+              <a:rPr sz="1200" b="0" lang="ja-JP">
+                <a:solidFill>
+                  <a:srgbClr val="13202B"/>
+                </a:solidFill>
+                <a:latin typeface="Noto Sans JP"/>
+                <a:ea typeface="Noto Sans JP"/>
+              </a:rPr>
+              <a:t>処置前後の画像と候補の記録・人の判断、archive export／</a:t>
+            </a:r>
+            <a:br/>
+            <a:r>
+              <a:rPr sz="1200" b="0" lang="ja-JP">
+                <a:solidFill>
+                  <a:srgbClr val="13202B"/>
+                </a:solidFill>
+                <a:latin typeface="Noto Sans JP"/>
+                <a:ea typeface="Noto Sans JP"/>
+              </a:rPr>
+              <a:t>restore、fsck</a:t>
+            </a:r>
+          </a:p>
+        </p:txBody>
+      </p:sp>
+      <p:sp>
+        <p:nvSpPr>
+          <p:cNvPr id="48" name="Text: 構想・未実装"/>
+          <p:cNvSpPr txBox="1"/>
+          <p:nvPr/>
+        </p:nvSpPr>
+        <p:spPr>
+          <a:xfrm>
+            <a:off x="6309360" y="5632703"/>
+            <a:ext cx="5157216" cy="219456"/>
+          </a:xfrm>
+          <a:prstGeom prst="rect">
+            <a:avLst/>
+          </a:prstGeom>
+          <a:noFill/>
+        </p:spPr>
+        <p:txBody>
+          <a:bodyPr wrap="square" lIns="18288" rIns="18288" tIns="18288" bIns="18288" anchor="t">
+            <a:spAutoFit/>
+          </a:bodyPr>
+          <a:lstStyle/>
+          <a:p>
+            <a:pPr algn="l">
+              <a:spcAft>
+                <a:spcPts val="0"/>
+              </a:spcAft>
+            </a:pPr>
+            <a:r>
+              <a:rPr sz="1200" b="1" lang="ja-JP">
+                <a:solidFill>
+                  <a:srgbClr val="8C450E"/>
+                </a:solidFill>
+                <a:latin typeface="Noto Sans JP"/>
+                <a:ea typeface="Noto Sans JP"/>
+              </a:rPr>
+              <a:t>構想・未実装</a:t>
+            </a:r>
+          </a:p>
+        </p:txBody>
+      </p:sp>
+      <p:sp>
+        <p:nvSpPr>
+          <p:cNvPr id="49" name="Text: Procedure／Hold Point／Cov"/>
+          <p:cNvSpPr txBox="1"/>
+          <p:nvPr/>
+        </p:nvSpPr>
+        <p:spPr>
+          <a:xfrm>
+            <a:off x="6309360" y="5852159"/>
+            <a:ext cx="5157216" cy="457200"/>
+          </a:xfrm>
+          <a:prstGeom prst="rect">
+            <a:avLst/>
+          </a:prstGeom>
+          <a:noFill/>
+        </p:spPr>
+        <p:txBody>
+          <a:bodyPr wrap="square" lIns="18288" rIns="18288" tIns="18288" bIns="18288" anchor="t">
+            <a:spAutoFit/>
+          </a:bodyPr>
+          <a:lstStyle/>
+          <a:p>
+            <a:pPr algn="l">
+              <a:spcAft>
+                <a:spcPts val="0"/>
+              </a:spcAft>
+            </a:pPr>
+            <a:r>
+              <a:rPr sz="1200" b="0" lang="ja-JP">
+                <a:solidFill>
+                  <a:srgbClr val="13202B"/>
+                </a:solidFill>
+                <a:latin typeface="Noto Sans JP"/>
+                <a:ea typeface="Noto Sans JP"/>
+              </a:rPr>
+              <a:t>Procedure／Hold Point／Coverage／EvidenceGapの構造化、</a:t>
+            </a:r>
+            <a:br/>
+            <a:r>
+              <a:rPr sz="1200" b="0" lang="ja-JP">
+                <a:solidFill>
+                  <a:srgbClr val="13202B"/>
+                </a:solidFill>
+                <a:latin typeface="Noto Sans JP"/>
+                <a:ea typeface="Noto Sans JP"/>
+              </a:rPr>
+              <a:t>引渡しpackの自動生成</a:t>
             </a:r>
           </a:p>
         </p:txBody>
       </p:sp>
       <p:cxnSp>
         <p:nvCxnSpPr>
-          <p:cNvPr id="45" name="Connector 44">
+          <p:cNvPr id="50" name="Connector 49">
             <a:extLst>
               <a:ext uri="{C183D7F6-B498-43B3-948B-1728B52AA6E4}">
                 <adec:decorative xmlns:adec="http://schemas.microsoft.com/office/drawing/2017/decorative" val="1"/>
@@ -21427,7 +22467,7 @@
       </p:cxnSp>
       <p:sp>
         <p:nvSpPr>
-          <p:cNvPr id="46" name="Text: Concept · v0.9.0 · 確認日 2"/>
+          <p:cNvPr id="51" name="Text: Concept · v0.9.0 · 確認日 2"/>
           <p:cNvSpPr txBox="1"/>
           <p:nvPr/>
         </p:nvSpPr>
@@ -21468,7 +22508,7 @@
       </p:sp>
       <p:sp>
         <p:nvSpPr>
-          <p:cNvPr id="47" name="Text: Core concept §§6, 14.1, "/>
+          <p:cNvPr id="52" name="Text: Core concept §§6, 14.1, "/>
           <p:cNvSpPr txBox="1"/>
           <p:nvPr/>
         </p:nvSpPr>
@@ -21501,14 +22541,14 @@
                 <a:latin typeface="Noto Sans JP"/>
                 <a:ea typeface="Noto Sans JP"/>
               </a:rPr>
-              <a:t>Core concept §§6, 14.1, 14.4, 20.2</a:t>
-            </a:r>
-          </a:p>
-        </p:txBody>
-      </p:sp>
-      <p:sp>
-        <p:nvSpPr>
-          <p:cNvPr id="48" name="Text: 07"/>
+              <a:t>Core concept §§6, 14.1, 14.4, 20.2 · project_status.md</a:t>
+            </a:r>
+          </a:p>
+        </p:txBody>
+      </p:sp>
+      <p:sp>
+        <p:nvSpPr>
+          <p:cNvPr id="53" name="Text: 07"/>
           <p:cNvSpPr txBox="1"/>
           <p:nvPr/>
         </p:nvSpPr>
@@ -22879,14 +23919,116 @@
       </p:sp>
       <p:sp>
         <p:nvSpPr>
-          <p:cNvPr id="29" name="Text: generated_by AI ／ select"/>
+          <p:cNvPr id="29" name="Status: now">
+            <a:extLst>
+              <a:ext uri="{C183D7F6-B498-43B3-948B-1728B52AA6E4}">
+                <adec:decorative xmlns:adec="http://schemas.microsoft.com/office/drawing/2017/decorative" val="1"/>
+              </a:ext>
+            </a:extLst>
+          </p:cNvPr>
+          <p:cNvSpPr/>
+          <p:nvPr/>
+        </p:nvSpPr>
+        <p:spPr>
+          <a:xfrm>
+            <a:off x="621792" y="5440680"/>
+            <a:ext cx="5431536" cy="896112"/>
+          </a:xfrm>
+          <a:prstGeom prst="roundRect">
+            <a:avLst/>
+          </a:prstGeom>
+          <a:solidFill>
+            <a:srgbClr val="DCEEE4"/>
+          </a:solidFill>
+          <a:ln w="12700">
+            <a:solidFill>
+              <a:srgbClr val="29704A"/>
+            </a:solidFill>
+          </a:ln>
+        </p:spPr>
+        <p:style>
+          <a:lnRef idx="1">
+            <a:schemeClr val="accent1"/>
+          </a:lnRef>
+          <a:fillRef idx="3">
+            <a:schemeClr val="accent1"/>
+          </a:fillRef>
+          <a:effectRef idx="2">
+            <a:schemeClr val="accent1"/>
+          </a:effectRef>
+          <a:fontRef idx="minor">
+            <a:schemeClr val="lt1"/>
+          </a:fontRef>
+        </p:style>
+        <p:txBody>
+          <a:bodyPr rtlCol="0" anchor="ctr"/>
+          <a:lstStyle/>
+          <a:p>
+            <a:pPr algn="ctr"/>
+          </a:p>
+        </p:txBody>
+      </p:sp>
+      <p:sp>
+        <p:nvSpPr>
+          <p:cNvPr id="30" name="Status: plan">
+            <a:extLst>
+              <a:ext uri="{C183D7F6-B498-43B3-948B-1728B52AA6E4}">
+                <adec:decorative xmlns:adec="http://schemas.microsoft.com/office/drawing/2017/decorative" val="1"/>
+              </a:ext>
+            </a:extLst>
+          </p:cNvPr>
+          <p:cNvSpPr/>
+          <p:nvPr/>
+        </p:nvSpPr>
+        <p:spPr>
+          <a:xfrm>
+            <a:off x="6163056" y="5440680"/>
+            <a:ext cx="5431536" cy="896112"/>
+          </a:xfrm>
+          <a:prstGeom prst="roundRect">
+            <a:avLst/>
+          </a:prstGeom>
+          <a:solidFill>
+            <a:srgbClr val="F5E4D4"/>
+          </a:solidFill>
+          <a:ln w="12700">
+            <a:solidFill>
+              <a:srgbClr val="8C450E"/>
+            </a:solidFill>
+          </a:ln>
+        </p:spPr>
+        <p:style>
+          <a:lnRef idx="1">
+            <a:schemeClr val="accent1"/>
+          </a:lnRef>
+          <a:fillRef idx="3">
+            <a:schemeClr val="accent1"/>
+          </a:fillRef>
+          <a:effectRef idx="2">
+            <a:schemeClr val="accent1"/>
+          </a:effectRef>
+          <a:fontRef idx="minor">
+            <a:schemeClr val="lt1"/>
+          </a:fontRef>
+        </p:style>
+        <p:txBody>
+          <a:bodyPr rtlCol="0" anchor="ctr"/>
+          <a:lstStyle/>
+          <a:p>
+            <a:pPr algn="ctr"/>
+          </a:p>
+        </p:txBody>
+      </p:sp>
+      <p:sp>
+        <p:nvSpPr>
+          <p:cNvPr id="31" name="Text: 今すぐ試せる（v0.9.0）"/>
           <p:cNvSpPr txBox="1"/>
           <p:nvPr/>
         </p:nvSpPr>
         <p:spPr>
           <a:xfrm>
-            <a:off x="841248" y="5897880"/>
-            <a:ext cx="10424160" cy="310896"/>
+            <a:off x="768096" y="5495544"/>
+            <a:ext cx="5157216" cy="219456"/>
           </a:xfrm>
           <a:prstGeom prst="rect">
             <a:avLst/>
@@ -22899,27 +24041,169 @@
           </a:bodyPr>
           <a:lstStyle/>
           <a:p>
-            <a:pPr algn="ctr">
+            <a:pPr algn="l">
               <a:spcAft>
                 <a:spcPts val="0"/>
               </a:spcAft>
             </a:pPr>
             <a:r>
-              <a:rPr sz="1300" b="0" lang="ja-JP">
-                <a:solidFill>
-                  <a:srgbClr val="C3CDDA"/>
-                </a:solidFill>
-                <a:latin typeface="Noto Sans JP"/>
-                <a:ea typeface="Noto Sans JP"/>
-              </a:rPr>
-              <a:t>generated_by AI ／ selected・modified・approved_by human を分離する。</a:t>
+              <a:rPr sz="1200" b="1" lang="ja-JP">
+                <a:solidFill>
+                  <a:srgbClr val="29704A"/>
+                </a:solidFill>
+                <a:latin typeface="Noto Sans JP"/>
+                <a:ea typeface="Noto Sans JP"/>
+              </a:rPr>
+              <a:t>今すぐ試せる（v0.9.0）</a:t>
+            </a:r>
+          </a:p>
+        </p:txBody>
+      </p:sp>
+      <p:sp>
+        <p:nvSpPr>
+          <p:cNvPr id="32" name="Text: 外部ツールのAI出力をcaller-suppli"/>
+          <p:cNvSpPr txBox="1"/>
+          <p:nvPr/>
+        </p:nvSpPr>
+        <p:spPr>
+          <a:xfrm>
+            <a:off x="768096" y="5715000"/>
+            <a:ext cx="5157216" cy="566928"/>
+          </a:xfrm>
+          <a:prstGeom prst="rect">
+            <a:avLst/>
+          </a:prstGeom>
+          <a:noFill/>
+        </p:spPr>
+        <p:txBody>
+          <a:bodyPr wrap="square" lIns="18288" rIns="18288" tIns="18288" bIns="18288" anchor="t">
+            <a:spAutoFit/>
+          </a:bodyPr>
+          <a:lstStyle/>
+          <a:p>
+            <a:pPr algn="l">
+              <a:spcAft>
+                <a:spcPts val="0"/>
+              </a:spcAft>
+            </a:pPr>
+            <a:r>
+              <a:rPr sz="1200" b="0" lang="ja-JP">
+                <a:solidFill>
+                  <a:srgbClr val="13202B"/>
+                </a:solidFill>
+                <a:latin typeface="Noto Sans JP"/>
+                <a:ea typeface="Noto Sans JP"/>
+              </a:rPr>
+              <a:t>外部ツールのAI出力をcaller-suppliedのAI-attributed proposal</a:t>
+            </a:r>
+            <a:br/>
+            <a:r>
+              <a:rPr sz="1200" b="0" lang="ja-JP">
+                <a:solidFill>
+                  <a:srgbClr val="13202B"/>
+                </a:solidFill>
+                <a:latin typeface="Noto Sans JP"/>
+                <a:ea typeface="Noto Sans JP"/>
+              </a:rPr>
+              <a:t>として記録し、人だけが判断する（派生・再レビューは別session）</a:t>
+            </a:r>
+          </a:p>
+        </p:txBody>
+      </p:sp>
+      <p:sp>
+        <p:nvSpPr>
+          <p:cNvPr id="33" name="Text: 構想・未実装"/>
+          <p:cNvSpPr txBox="1"/>
+          <p:nvPr/>
+        </p:nvSpPr>
+        <p:spPr>
+          <a:xfrm>
+            <a:off x="6309360" y="5495544"/>
+            <a:ext cx="5157216" cy="219456"/>
+          </a:xfrm>
+          <a:prstGeom prst="rect">
+            <a:avLst/>
+          </a:prstGeom>
+          <a:noFill/>
+        </p:spPr>
+        <p:txBody>
+          <a:bodyPr wrap="square" lIns="18288" rIns="18288" tIns="18288" bIns="18288" anchor="t">
+            <a:spAutoFit/>
+          </a:bodyPr>
+          <a:lstStyle/>
+          <a:p>
+            <a:pPr algn="l">
+              <a:spcAft>
+                <a:spcPts val="0"/>
+              </a:spcAft>
+            </a:pPr>
+            <a:r>
+              <a:rPr sz="1200" b="1" lang="ja-JP">
+                <a:solidFill>
+                  <a:srgbClr val="8C450E"/>
+                </a:solidFill>
+                <a:latin typeface="Noto Sans JP"/>
+                <a:ea typeface="Noto Sans JP"/>
+              </a:rPr>
+              <a:t>構想・未実装</a:t>
+            </a:r>
+          </a:p>
+        </p:txBody>
+      </p:sp>
+      <p:sp>
+        <p:nvSpPr>
+          <p:cNvPr id="34" name="Text: Context Packからの複数proposa"/>
+          <p:cNvSpPr txBox="1"/>
+          <p:nvPr/>
+        </p:nvSpPr>
+        <p:spPr>
+          <a:xfrm>
+            <a:off x="6309360" y="5715000"/>
+            <a:ext cx="5157216" cy="566928"/>
+          </a:xfrm>
+          <a:prstGeom prst="rect">
+            <a:avLst/>
+          </a:prstGeom>
+          <a:noFill/>
+        </p:spPr>
+        <p:txBody>
+          <a:bodyPr wrap="square" lIns="18288" rIns="18288" tIns="18288" bIns="18288" anchor="t">
+            <a:spAutoFit/>
+          </a:bodyPr>
+          <a:lstStyle/>
+          <a:p>
+            <a:pPr algn="l">
+              <a:spcAft>
+                <a:spcPts val="0"/>
+              </a:spcAft>
+            </a:pPr>
+            <a:r>
+              <a:rPr sz="1200" b="0" lang="ja-JP">
+                <a:solidFill>
+                  <a:srgbClr val="13202B"/>
+                </a:solidFill>
+                <a:latin typeface="Noto Sans JP"/>
+                <a:ea typeface="Noto Sans JP"/>
+              </a:rPr>
+              <a:t>Context Packからの複数proposal系列の自動生成・AI model実行・</a:t>
+            </a:r>
+            <a:br/>
+            <a:r>
+              <a:rPr sz="1200" b="0" lang="ja-JP">
+                <a:solidFill>
+                  <a:srgbClr val="13202B"/>
+                </a:solidFill>
+                <a:latin typeface="Noto Sans JP"/>
+                <a:ea typeface="Noto Sans JP"/>
+              </a:rPr>
+              <a:t>部分採用</a:t>
             </a:r>
           </a:p>
         </p:txBody>
       </p:sp>
       <p:cxnSp>
         <p:nvCxnSpPr>
-          <p:cNvPr id="30" name="Connector 29">
+          <p:cNvPr id="35" name="Connector 34">
             <a:extLst>
               <a:ext uri="{C183D7F6-B498-43B3-948B-1728B52AA6E4}">
                 <adec:decorative xmlns:adec="http://schemas.microsoft.com/office/drawing/2017/decorative" val="1"/>
@@ -22960,7 +24244,7 @@
       </p:cxnSp>
       <p:sp>
         <p:nvSpPr>
-          <p:cNvPr id="31" name="Text: Concept · v0.9.0 · 確認日 2"/>
+          <p:cNvPr id="36" name="Text: Concept · v0.9.0 · 確認日 2"/>
           <p:cNvSpPr txBox="1"/>
           <p:nvPr/>
         </p:nvSpPr>
@@ -23001,7 +24285,7 @@
       </p:sp>
       <p:sp>
         <p:nvSpPr>
-          <p:cNvPr id="32" name="Text: Core concept §21 · Stage"/>
+          <p:cNvPr id="37" name="Text: Core concept §21 · Stage"/>
           <p:cNvSpPr txBox="1"/>
           <p:nvPr/>
         </p:nvSpPr>
@@ -23034,14 +24318,14 @@
                 <a:latin typeface="Noto Sans JP"/>
                 <a:ea typeface="Noto Sans JP"/>
               </a:rPr>
-              <a:t>Core concept §21 · Stage 0 Workstream D</a:t>
-            </a:r>
-          </a:p>
-        </p:txBody>
-      </p:sp>
-      <p:sp>
-        <p:nvSpPr>
-          <p:cNvPr id="33" name="Text: 08"/>
+              <a:t>Core concept §21 · Stage 0 Workstream D · project_status.md</a:t>
+            </a:r>
+          </a:p>
+        </p:txBody>
+      </p:sp>
+      <p:sp>
+        <p:nvSpPr>
+          <p:cNvPr id="38" name="Text: 08"/>
           <p:cNvSpPr txBox="1"/>
           <p:nvPr/>
         </p:nvSpPr>
@@ -23371,7 +24655,7 @@
         <p:spPr>
           <a:xfrm flipH="1">
             <a:off x="5669280" y="3273552"/>
-            <a:ext cx="420624" cy="2240280"/>
+            <a:ext cx="420624" cy="1664207"/>
           </a:xfrm>
           <a:prstGeom prst="line">
             <a:avLst/>
@@ -23949,7 +25233,7 @@
         </p:nvSpPr>
         <p:spPr>
           <a:xfrm>
-            <a:off x="4370832" y="5010912"/>
+            <a:off x="4370832" y="4434840"/>
             <a:ext cx="2596896" cy="1005840"/>
           </a:xfrm>
           <a:prstGeom prst="roundRect">
@@ -24000,7 +25284,7 @@
         </p:nvSpPr>
         <p:spPr>
           <a:xfrm>
-            <a:off x="4535424" y="5175504"/>
+            <a:off x="4535424" y="4599431"/>
             <a:ext cx="128016" cy="676656"/>
           </a:xfrm>
           <a:prstGeom prst="roundRect">
@@ -24043,7 +25327,7 @@
         </p:nvSpPr>
         <p:spPr>
           <a:xfrm>
-            <a:off x="4809744" y="5138928"/>
+            <a:off x="4809744" y="4562855"/>
             <a:ext cx="1975103" cy="347472"/>
           </a:xfrm>
           <a:prstGeom prst="rect">
@@ -24083,7 +25367,7 @@
         </p:nvSpPr>
         <p:spPr>
           <a:xfrm>
-            <a:off x="4809744" y="5541264"/>
+            <a:off x="4809744" y="4965192"/>
             <a:ext cx="1975103" cy="365759"/>
           </a:xfrm>
           <a:prstGeom prst="rect">
@@ -24257,7 +25541,7 @@
       </p:sp>
       <p:sp>
         <p:nvSpPr>
-          <p:cNvPr id="28" name="Text: Evidence／Observation"/>
+          <p:cNvPr id="28" name="Text: Evidence記録"/>
           <p:cNvSpPr txBox="1"/>
           <p:nvPr/>
         </p:nvSpPr>
@@ -24290,7 +25574,7 @@
                 <a:latin typeface="Noto Sans JP"/>
                 <a:ea typeface="Noto Sans JP"/>
               </a:rPr>
-              <a:t>Evidence／Observation</a:t>
+              <a:t>Evidence記録</a:t>
             </a:r>
           </a:p>
         </p:txBody>
@@ -24659,14 +25943,116 @@
       </p:sp>
       <p:sp>
         <p:nvSpPr>
-          <p:cNvPr id="37" name="Text: hashで照合できるのは記録の同一性。内容の真実"/>
+          <p:cNvPr id="37" name="Status: now">
+            <a:extLst>
+              <a:ext uri="{C183D7F6-B498-43B3-948B-1728B52AA6E4}">
+                <adec:decorative xmlns:adec="http://schemas.microsoft.com/office/drawing/2017/decorative" val="1"/>
+              </a:ext>
+            </a:extLst>
+          </p:cNvPr>
+          <p:cNvSpPr/>
+          <p:nvPr/>
+        </p:nvSpPr>
+        <p:spPr>
+          <a:xfrm>
+            <a:off x="621792" y="5632704"/>
+            <a:ext cx="5431536" cy="749808"/>
+          </a:xfrm>
+          <a:prstGeom prst="roundRect">
+            <a:avLst/>
+          </a:prstGeom>
+          <a:solidFill>
+            <a:srgbClr val="DCEEE4"/>
+          </a:solidFill>
+          <a:ln w="12700">
+            <a:solidFill>
+              <a:srgbClr val="29704A"/>
+            </a:solidFill>
+          </a:ln>
+        </p:spPr>
+        <p:style>
+          <a:lnRef idx="1">
+            <a:schemeClr val="accent1"/>
+          </a:lnRef>
+          <a:fillRef idx="3">
+            <a:schemeClr val="accent1"/>
+          </a:fillRef>
+          <a:effectRef idx="2">
+            <a:schemeClr val="accent1"/>
+          </a:effectRef>
+          <a:fontRef idx="minor">
+            <a:schemeClr val="lt1"/>
+          </a:fontRef>
+        </p:style>
+        <p:txBody>
+          <a:bodyPr rtlCol="0" anchor="ctr"/>
+          <a:lstStyle/>
+          <a:p>
+            <a:pPr algn="ctr"/>
+          </a:p>
+        </p:txBody>
+      </p:sp>
+      <p:sp>
+        <p:nvSpPr>
+          <p:cNvPr id="38" name="Status: plan">
+            <a:extLst>
+              <a:ext uri="{C183D7F6-B498-43B3-948B-1728B52AA6E4}">
+                <adec:decorative xmlns:adec="http://schemas.microsoft.com/office/drawing/2017/decorative" val="1"/>
+              </a:ext>
+            </a:extLst>
+          </p:cNvPr>
+          <p:cNvSpPr/>
+          <p:nvPr/>
+        </p:nvSpPr>
+        <p:spPr>
+          <a:xfrm>
+            <a:off x="6163056" y="5632704"/>
+            <a:ext cx="5431536" cy="749808"/>
+          </a:xfrm>
+          <a:prstGeom prst="roundRect">
+            <a:avLst/>
+          </a:prstGeom>
+          <a:solidFill>
+            <a:srgbClr val="F5E4D4"/>
+          </a:solidFill>
+          <a:ln w="12700">
+            <a:solidFill>
+              <a:srgbClr val="8C450E"/>
+            </a:solidFill>
+          </a:ln>
+        </p:spPr>
+        <p:style>
+          <a:lnRef idx="1">
+            <a:schemeClr val="accent1"/>
+          </a:lnRef>
+          <a:fillRef idx="3">
+            <a:schemeClr val="accent1"/>
+          </a:fillRef>
+          <a:effectRef idx="2">
+            <a:schemeClr val="accent1"/>
+          </a:effectRef>
+          <a:fontRef idx="minor">
+            <a:schemeClr val="lt1"/>
+          </a:fontRef>
+        </p:style>
+        <p:txBody>
+          <a:bodyPr rtlCol="0" anchor="ctr"/>
+          <a:lstStyle/>
+          <a:p>
+            <a:pPr algn="ctr"/>
+          </a:p>
+        </p:txBody>
+      </p:sp>
+      <p:sp>
+        <p:nvSpPr>
+          <p:cNvPr id="39" name="Text: 今すぐ試せる（v0.9.0）"/>
           <p:cNvSpPr txBox="1"/>
           <p:nvPr/>
         </p:nvSpPr>
         <p:spPr>
           <a:xfrm>
-            <a:off x="1170432" y="6035040"/>
-            <a:ext cx="9857232" cy="310896"/>
+            <a:off x="768096" y="5687568"/>
+            <a:ext cx="5157216" cy="219456"/>
           </a:xfrm>
           <a:prstGeom prst="rect">
             <a:avLst/>
@@ -24679,27 +26065,169 @@
           </a:bodyPr>
           <a:lstStyle/>
           <a:p>
-            <a:pPr algn="ctr">
+            <a:pPr algn="l">
               <a:spcAft>
                 <a:spcPts val="0"/>
               </a:spcAft>
             </a:pPr>
             <a:r>
-              <a:rPr sz="1250" b="0" lang="ja-JP">
-                <a:solidFill>
-                  <a:srgbClr val="5E6873"/>
-                </a:solidFill>
-                <a:latin typeface="Noto Sans JP"/>
-                <a:ea typeface="Noto Sans JP"/>
-              </a:rPr>
-              <a:t>hashで照合できるのは記録の同一性。内容の真実性、作者性、永久保存を保証するものではない。</a:t>
+              <a:rPr sz="1200" b="1" lang="ja-JP">
+                <a:solidFill>
+                  <a:srgbClr val="29704A"/>
+                </a:solidFill>
+                <a:latin typeface="Noto Sans JP"/>
+                <a:ea typeface="Noto Sans JP"/>
+              </a:rPr>
+              <a:t>今すぐ試せる（v0.9.0）</a:t>
+            </a:r>
+          </a:p>
+        </p:txBody>
+      </p:sp>
+      <p:sp>
+        <p:nvSpPr>
+          <p:cNvPr id="40" name="Text: creator-report、localhost"/>
+          <p:cNvSpPr txBox="1"/>
+          <p:nvPr/>
+        </p:nvSpPr>
+        <p:spPr>
+          <a:xfrm>
+            <a:off x="768096" y="5907024"/>
+            <a:ext cx="5157216" cy="420623"/>
+          </a:xfrm>
+          <a:prstGeom prst="rect">
+            <a:avLst/>
+          </a:prstGeom>
+          <a:noFill/>
+        </p:spPr>
+        <p:txBody>
+          <a:bodyPr wrap="square" lIns="18288" rIns="18288" tIns="18288" bIns="18288" anchor="t">
+            <a:spAutoFit/>
+          </a:bodyPr>
+          <a:lstStyle/>
+          <a:p>
+            <a:pPr algn="l">
+              <a:spcAft>
+                <a:spcPts val="0"/>
+              </a:spcAft>
+            </a:pPr>
+            <a:r>
+              <a:rPr sz="1200" b="0" lang="ja-JP">
+                <a:solidFill>
+                  <a:srgbClr val="13202B"/>
+                </a:solidFill>
+                <a:latin typeface="Noto Sans JP"/>
+                <a:ea typeface="Noto Sans JP"/>
+              </a:rPr>
+              <a:t>creator-report、localhost UIでの理由・timeline閲覧、archive／</a:t>
+            </a:r>
+            <a:br/>
+            <a:r>
+              <a:rPr sz="1200" b="0" lang="ja-JP">
+                <a:solidFill>
+                  <a:srgbClr val="13202B"/>
+                </a:solidFill>
+                <a:latin typeface="Noto Sans JP"/>
+                <a:ea typeface="Noto Sans JP"/>
+              </a:rPr>
+              <a:t>restore、synapse-presentのlocal publication view</a:t>
+            </a:r>
+          </a:p>
+        </p:txBody>
+      </p:sp>
+      <p:sp>
+        <p:nvSpPr>
+          <p:cNvPr id="41" name="Text: 構想・未実装"/>
+          <p:cNvSpPr txBox="1"/>
+          <p:nvPr/>
+        </p:nvSpPr>
+        <p:spPr>
+          <a:xfrm>
+            <a:off x="6309360" y="5687568"/>
+            <a:ext cx="5157216" cy="219456"/>
+          </a:xfrm>
+          <a:prstGeom prst="rect">
+            <a:avLst/>
+          </a:prstGeom>
+          <a:noFill/>
+        </p:spPr>
+        <p:txBody>
+          <a:bodyPr wrap="square" lIns="18288" rIns="18288" tIns="18288" bIns="18288" anchor="t">
+            <a:spAutoFit/>
+          </a:bodyPr>
+          <a:lstStyle/>
+          <a:p>
+            <a:pPr algn="l">
+              <a:spcAft>
+                <a:spcPts val="0"/>
+              </a:spcAft>
+            </a:pPr>
+            <a:r>
+              <a:rPr sz="1200" b="1" lang="ja-JP">
+                <a:solidFill>
+                  <a:srgbClr val="8C450E"/>
+                </a:solidFill>
+                <a:latin typeface="Noto Sans JP"/>
+                <a:ea typeface="Noto Sans JP"/>
+              </a:rPr>
+              <a:t>構想・未実装</a:t>
+            </a:r>
+          </a:p>
+        </p:txBody>
+      </p:sp>
+      <p:sp>
+        <p:nvSpPr>
+          <p:cNvPr id="42" name="Text: 方向付きDiff（何が変わったかの自動可視化）。"/>
+          <p:cNvSpPr txBox="1"/>
+          <p:nvPr/>
+        </p:nvSpPr>
+        <p:spPr>
+          <a:xfrm>
+            <a:off x="6309360" y="5907024"/>
+            <a:ext cx="5157216" cy="420623"/>
+          </a:xfrm>
+          <a:prstGeom prst="rect">
+            <a:avLst/>
+          </a:prstGeom>
+          <a:noFill/>
+        </p:spPr>
+        <p:txBody>
+          <a:bodyPr wrap="square" lIns="18288" rIns="18288" tIns="18288" bIns="18288" anchor="t">
+            <a:spAutoFit/>
+          </a:bodyPr>
+          <a:lstStyle/>
+          <a:p>
+            <a:pPr algn="l">
+              <a:spcAft>
+                <a:spcPts val="0"/>
+              </a:spcAft>
+            </a:pPr>
+            <a:r>
+              <a:rPr sz="1200" b="0" lang="ja-JP">
+                <a:solidFill>
+                  <a:srgbClr val="13202B"/>
+                </a:solidFill>
+                <a:latin typeface="Noto Sans JP"/>
+                <a:ea typeface="Noto Sans JP"/>
+              </a:rPr>
+              <a:t>方向付きDiff（何が変わったかの自動可視化）。2分到達は</a:t>
+            </a:r>
+            <a:br/>
+            <a:r>
+              <a:rPr sz="1200" b="0" lang="ja-JP">
+                <a:solidFill>
+                  <a:srgbClr val="13202B"/>
+                </a:solidFill>
+                <a:latin typeface="Noto Sans JP"/>
+                <a:ea typeface="Noto Sans JP"/>
+              </a:rPr>
+              <a:t>Pilot目標であり実績値ではない</a:t>
             </a:r>
           </a:p>
         </p:txBody>
       </p:sp>
       <p:cxnSp>
         <p:nvCxnSpPr>
-          <p:cNvPr id="38" name="Connector 37">
+          <p:cNvPr id="43" name="Connector 42">
             <a:extLst>
               <a:ext uri="{C183D7F6-B498-43B3-948B-1728B52AA6E4}">
                 <adec:decorative xmlns:adec="http://schemas.microsoft.com/office/drawing/2017/decorative" val="1"/>
@@ -24740,7 +26268,7 @@
       </p:cxnSp>
       <p:sp>
         <p:nvSpPr>
-          <p:cNvPr id="39" name="Text: Concept · v0.9.0 · 確認日 2"/>
+          <p:cNvPr id="44" name="Text: Concept · v0.9.0 · 確認日 2"/>
           <p:cNvSpPr txBox="1"/>
           <p:nvPr/>
         </p:nvSpPr>
@@ -24781,7 +26309,7 @@
       </p:sp>
       <p:sp>
         <p:nvSpPr>
-          <p:cNvPr id="40" name="Text: Core concept §§20.2, 20."/>
+          <p:cNvPr id="45" name="Text: Core concept §§20.2, 20."/>
           <p:cNvSpPr txBox="1"/>
           <p:nvPr/>
         </p:nvSpPr>
@@ -24814,14 +26342,14 @@
                 <a:latin typeface="Noto Sans JP"/>
                 <a:ea typeface="Noto Sans JP"/>
               </a:rPr>
-              <a:t>Core concept §§20.2, 20.6 · Pilot target</a:t>
-            </a:r>
-          </a:p>
-        </p:txBody>
-      </p:sp>
-      <p:sp>
-        <p:nvSpPr>
-          <p:cNvPr id="41" name="Text: 09"/>
+              <a:t>Core concept §§20.2, 20.6 · Pilot target · project_status.md</a:t>
+            </a:r>
+          </a:p>
+        </p:txBody>
+      </p:sp>
+      <p:sp>
+        <p:nvSpPr>
+          <p:cNvPr id="46" name="Text: 09"/>
           <p:cNvSpPr txBox="1"/>
           <p:nvPr/>
         </p:nvSpPr>

--- a/docs/presentations/synapsegit_user_scenarios_ja.pptx
+++ b/docs/presentations/synapsegit_user_scenarios_ja.pptx
@@ -5502,13 +5502,718 @@
       </p:sp>
       <p:sp>
         <p:nvSpPr>
-          <p:cNvPr id="11" name="今すぐ試せる·v0.9.0" title="今すぐ試せる·v0.9.0" descr="今すぐ試せる·v0.9.0"/>
+          <p:cNvPr id="11" name="構想・未実装" title="構想・未実装" descr="構想・未実装"/>
           <p:cNvSpPr/>
           <p:nvPr/>
         </p:nvSpPr>
         <p:spPr>
           <a:xfrm>
             <a:off x="2578608" y="2441448"/>
+            <a:ext cx="1481328" cy="237744"/>
+          </a:xfrm>
+          <a:prstGeom prst="roundRect">
+            <a:avLst/>
+          </a:prstGeom>
+          <a:solidFill>
+            <a:srgbClr val="F5E4D4"/>
+          </a:solidFill>
+          <a:ln w="8890">
+            <a:solidFill>
+              <a:srgbClr val="8C450E"/>
+            </a:solidFill>
+          </a:ln>
+        </p:spPr>
+        <p:style>
+          <a:lnRef idx="1">
+            <a:schemeClr val="accent1"/>
+          </a:lnRef>
+          <a:fillRef idx="3">
+            <a:schemeClr val="accent1"/>
+          </a:fillRef>
+          <a:effectRef idx="2">
+            <a:schemeClr val="accent1"/>
+          </a:effectRef>
+          <a:fontRef idx="minor">
+            <a:schemeClr val="lt1"/>
+          </a:fontRef>
+        </p:style>
+        <p:txBody>
+          <a:bodyPr rtlCol="0" anchor="ctr" lIns="0" rIns="0" tIns="0" bIns="0"/>
+          <a:lstStyle/>
+          <a:p>
+            <a:pPr algn="ctr"/>
+            <a:r>
+              <a:rPr sz="1050" b="1" lang="ja-JP">
+                <a:solidFill>
+                  <a:srgbClr val="8C450E"/>
+                </a:solidFill>
+                <a:latin typeface="Noto Sans JP"/>
+                <a:ea typeface="Noto Sans JP"/>
+              </a:rPr>
+              <a:t>構想・未実装</a:t>
+            </a:r>
+          </a:p>
+        </p:txBody>
+      </p:sp>
+      <p:sp>
+        <p:nvSpPr>
+          <p:cNvPr id="12" name="Card: 02  条件を決める">
+            <a:extLst>
+              <a:ext uri="{C183D7F6-B498-43B3-948B-1728B52AA6E4}">
+                <adec:decorative xmlns:adec="http://schemas.microsoft.com/office/drawing/2017/decorative" val="1"/>
+              </a:ext>
+            </a:extLst>
+          </p:cNvPr>
+          <p:cNvSpPr/>
+          <p:nvPr/>
+        </p:nvSpPr>
+        <p:spPr>
+          <a:xfrm>
+            <a:off x="4407407" y="2560320"/>
+            <a:ext cx="3456432" cy="1024128"/>
+          </a:xfrm>
+          <a:prstGeom prst="roundRect">
+            <a:avLst/>
+          </a:prstGeom>
+          <a:solidFill>
+            <a:srgbClr val="FFFFFF"/>
+          </a:solidFill>
+          <a:ln w="10160">
+            <a:solidFill>
+              <a:srgbClr val="7B858A"/>
+            </a:solidFill>
+          </a:ln>
+        </p:spPr>
+        <p:style>
+          <a:lnRef idx="1">
+            <a:schemeClr val="accent1"/>
+          </a:lnRef>
+          <a:fillRef idx="3">
+            <a:schemeClr val="accent1"/>
+          </a:fillRef>
+          <a:effectRef idx="2">
+            <a:schemeClr val="accent1"/>
+          </a:effectRef>
+          <a:fontRef idx="minor">
+            <a:schemeClr val="lt1"/>
+          </a:fontRef>
+        </p:style>
+        <p:txBody>
+          <a:bodyPr rtlCol="0" anchor="ctr"/>
+          <a:lstStyle/>
+          <a:p>
+            <a:pPr algn="ctr"/>
+          </a:p>
+        </p:txBody>
+      </p:sp>
+      <p:sp>
+        <p:nvSpPr>
+          <p:cNvPr id="13" name="Accent: 02  条件を決める">
+            <a:extLst>
+              <a:ext uri="{C183D7F6-B498-43B3-948B-1728B52AA6E4}">
+                <adec:decorative xmlns:adec="http://schemas.microsoft.com/office/drawing/2017/decorative" val="1"/>
+              </a:ext>
+            </a:extLst>
+          </p:cNvPr>
+          <p:cNvSpPr/>
+          <p:nvPr/>
+        </p:nvSpPr>
+        <p:spPr>
+          <a:xfrm>
+            <a:off x="4571999" y="2724912"/>
+            <a:ext cx="128016" cy="694944"/>
+          </a:xfrm>
+          <a:prstGeom prst="roundRect">
+            <a:avLst/>
+          </a:prstGeom>
+          <a:solidFill>
+            <a:srgbClr val="0B6E69"/>
+          </a:solidFill>
+          <a:ln>
+            <a:noFill/>
+          </a:ln>
+        </p:spPr>
+        <p:style>
+          <a:lnRef idx="1">
+            <a:schemeClr val="accent1"/>
+          </a:lnRef>
+          <a:fillRef idx="3">
+            <a:schemeClr val="accent1"/>
+          </a:fillRef>
+          <a:effectRef idx="2">
+            <a:schemeClr val="accent1"/>
+          </a:effectRef>
+          <a:fontRef idx="minor">
+            <a:schemeClr val="lt1"/>
+          </a:fontRef>
+        </p:style>
+        <p:txBody>
+          <a:bodyPr rtlCol="0" anchor="ctr"/>
+          <a:lstStyle/>
+          <a:p>
+            <a:pPr algn="ctr"/>
+          </a:p>
+        </p:txBody>
+      </p:sp>
+      <p:sp>
+        <p:nvSpPr>
+          <p:cNvPr id="14" name="Text: 02  条件を決める"/>
+          <p:cNvSpPr txBox="1"/>
+          <p:nvPr/>
+        </p:nvSpPr>
+        <p:spPr>
+          <a:xfrm>
+            <a:off x="4846319" y="2688336"/>
+            <a:ext cx="2834639" cy="347472"/>
+          </a:xfrm>
+          <a:prstGeom prst="rect">
+            <a:avLst/>
+          </a:prstGeom>
+          <a:noFill/>
+        </p:spPr>
+        <p:txBody>
+          <a:bodyPr wrap="square" lIns="18288" rIns="18288" tIns="18288" bIns="18288" anchor="t">
+            <a:spAutoFit/>
+          </a:bodyPr>
+          <a:lstStyle/>
+          <a:p>
+            <a:pPr algn="l">
+              <a:spcAft>
+                <a:spcPts val="0"/>
+              </a:spcAft>
+            </a:pPr>
+            <a:r>
+              <a:rPr sz="1550" b="1" lang="ja-JP">
+                <a:solidFill>
+                  <a:srgbClr val="0B6E69"/>
+                </a:solidFill>
+                <a:latin typeface="Noto Sans JP"/>
+                <a:ea typeface="Noto Sans JP"/>
+              </a:rPr>
+              <a:t>02  条件を決める</a:t>
+            </a:r>
+          </a:p>
+        </p:txBody>
+      </p:sp>
+      <p:sp>
+        <p:nvSpPr>
+          <p:cNvPr id="15" name="Text: Imported／Repeatable／Cali"/>
+          <p:cNvSpPr txBox="1"/>
+          <p:nvPr/>
+        </p:nvSpPr>
+        <p:spPr>
+          <a:xfrm>
+            <a:off x="4846319" y="3090672"/>
+            <a:ext cx="2834639" cy="384048"/>
+          </a:xfrm>
+          <a:prstGeom prst="rect">
+            <a:avLst/>
+          </a:prstGeom>
+          <a:noFill/>
+        </p:spPr>
+        <p:txBody>
+          <a:bodyPr wrap="square" lIns="18288" rIns="18288" tIns="18288" bIns="18288" anchor="t">
+            <a:spAutoFit/>
+          </a:bodyPr>
+          <a:lstStyle/>
+          <a:p>
+            <a:pPr algn="l">
+              <a:spcAft>
+                <a:spcPts val="0"/>
+              </a:spcAft>
+            </a:pPr>
+            <a:r>
+              <a:rPr sz="1400" b="0" lang="ja-JP">
+                <a:solidFill>
+                  <a:srgbClr val="13202B"/>
+                </a:solidFill>
+                <a:latin typeface="Noto Sans JP"/>
+                <a:ea typeface="Noto Sans JP"/>
+              </a:rPr>
+              <a:t>Imported／Repeatable／Calibrated</a:t>
+            </a:r>
+          </a:p>
+        </p:txBody>
+      </p:sp>
+      <p:sp>
+        <p:nvSpPr>
+          <p:cNvPr id="16" name="構想・未実装" title="構想・未実装" descr="構想・未実装"/>
+          <p:cNvSpPr/>
+          <p:nvPr/>
+        </p:nvSpPr>
+        <p:spPr>
+          <a:xfrm>
+            <a:off x="6327648" y="2441448"/>
+            <a:ext cx="1481328" cy="237744"/>
+          </a:xfrm>
+          <a:prstGeom prst="roundRect">
+            <a:avLst/>
+          </a:prstGeom>
+          <a:solidFill>
+            <a:srgbClr val="F5E4D4"/>
+          </a:solidFill>
+          <a:ln w="8890">
+            <a:solidFill>
+              <a:srgbClr val="8C450E"/>
+            </a:solidFill>
+          </a:ln>
+        </p:spPr>
+        <p:style>
+          <a:lnRef idx="1">
+            <a:schemeClr val="accent1"/>
+          </a:lnRef>
+          <a:fillRef idx="3">
+            <a:schemeClr val="accent1"/>
+          </a:fillRef>
+          <a:effectRef idx="2">
+            <a:schemeClr val="accent1"/>
+          </a:effectRef>
+          <a:fontRef idx="minor">
+            <a:schemeClr val="lt1"/>
+          </a:fontRef>
+        </p:style>
+        <p:txBody>
+          <a:bodyPr rtlCol="0" anchor="ctr" lIns="0" rIns="0" tIns="0" bIns="0"/>
+          <a:lstStyle/>
+          <a:p>
+            <a:pPr algn="ctr"/>
+            <a:r>
+              <a:rPr sz="1050" b="1" lang="ja-JP">
+                <a:solidFill>
+                  <a:srgbClr val="8C450E"/>
+                </a:solidFill>
+                <a:latin typeface="Noto Sans JP"/>
+                <a:ea typeface="Noto Sans JP"/>
+              </a:rPr>
+              <a:t>構想・未実装</a:t>
+            </a:r>
+          </a:p>
+        </p:txBody>
+      </p:sp>
+      <p:sp>
+        <p:nvSpPr>
+          <p:cNvPr id="17" name="Card: 03  節目で撮る">
+            <a:extLst>
+              <a:ext uri="{C183D7F6-B498-43B3-948B-1728B52AA6E4}">
+                <adec:decorative xmlns:adec="http://schemas.microsoft.com/office/drawing/2017/decorative" val="1"/>
+              </a:ext>
+            </a:extLst>
+          </p:cNvPr>
+          <p:cNvSpPr/>
+          <p:nvPr/>
+        </p:nvSpPr>
+        <p:spPr>
+          <a:xfrm>
+            <a:off x="8156448" y="2560320"/>
+            <a:ext cx="3456432" cy="1024128"/>
+          </a:xfrm>
+          <a:prstGeom prst="roundRect">
+            <a:avLst/>
+          </a:prstGeom>
+          <a:solidFill>
+            <a:srgbClr val="FFFFFF"/>
+          </a:solidFill>
+          <a:ln w="10160">
+            <a:solidFill>
+              <a:srgbClr val="7B858A"/>
+            </a:solidFill>
+          </a:ln>
+        </p:spPr>
+        <p:style>
+          <a:lnRef idx="1">
+            <a:schemeClr val="accent1"/>
+          </a:lnRef>
+          <a:fillRef idx="3">
+            <a:schemeClr val="accent1"/>
+          </a:fillRef>
+          <a:effectRef idx="2">
+            <a:schemeClr val="accent1"/>
+          </a:effectRef>
+          <a:fontRef idx="minor">
+            <a:schemeClr val="lt1"/>
+          </a:fontRef>
+        </p:style>
+        <p:txBody>
+          <a:bodyPr rtlCol="0" anchor="ctr"/>
+          <a:lstStyle/>
+          <a:p>
+            <a:pPr algn="ctr"/>
+          </a:p>
+        </p:txBody>
+      </p:sp>
+      <p:sp>
+        <p:nvSpPr>
+          <p:cNvPr id="18" name="Accent: 03  節目で撮る">
+            <a:extLst>
+              <a:ext uri="{C183D7F6-B498-43B3-948B-1728B52AA6E4}">
+                <adec:decorative xmlns:adec="http://schemas.microsoft.com/office/drawing/2017/decorative" val="1"/>
+              </a:ext>
+            </a:extLst>
+          </p:cNvPr>
+          <p:cNvSpPr/>
+          <p:nvPr/>
+        </p:nvSpPr>
+        <p:spPr>
+          <a:xfrm>
+            <a:off x="8321040" y="2724912"/>
+            <a:ext cx="128016" cy="694944"/>
+          </a:xfrm>
+          <a:prstGeom prst="roundRect">
+            <a:avLst/>
+          </a:prstGeom>
+          <a:solidFill>
+            <a:srgbClr val="8C450E"/>
+          </a:solidFill>
+          <a:ln>
+            <a:noFill/>
+          </a:ln>
+        </p:spPr>
+        <p:style>
+          <a:lnRef idx="1">
+            <a:schemeClr val="accent1"/>
+          </a:lnRef>
+          <a:fillRef idx="3">
+            <a:schemeClr val="accent1"/>
+          </a:fillRef>
+          <a:effectRef idx="2">
+            <a:schemeClr val="accent1"/>
+          </a:effectRef>
+          <a:fontRef idx="minor">
+            <a:schemeClr val="lt1"/>
+          </a:fontRef>
+        </p:style>
+        <p:txBody>
+          <a:bodyPr rtlCol="0" anchor="ctr"/>
+          <a:lstStyle/>
+          <a:p>
+            <a:pPr algn="ctr"/>
+          </a:p>
+        </p:txBody>
+      </p:sp>
+      <p:sp>
+        <p:nvSpPr>
+          <p:cNvPr id="19" name="Text: 03  節目で撮る"/>
+          <p:cNvSpPr txBox="1"/>
+          <p:nvPr/>
+        </p:nvSpPr>
+        <p:spPr>
+          <a:xfrm>
+            <a:off x="8595360" y="2688336"/>
+            <a:ext cx="2834639" cy="347472"/>
+          </a:xfrm>
+          <a:prstGeom prst="rect">
+            <a:avLst/>
+          </a:prstGeom>
+          <a:noFill/>
+        </p:spPr>
+        <p:txBody>
+          <a:bodyPr wrap="square" lIns="18288" rIns="18288" tIns="18288" bIns="18288" anchor="t">
+            <a:spAutoFit/>
+          </a:bodyPr>
+          <a:lstStyle/>
+          <a:p>
+            <a:pPr algn="l">
+              <a:spcAft>
+                <a:spcPts val="0"/>
+              </a:spcAft>
+            </a:pPr>
+            <a:r>
+              <a:rPr sz="1550" b="1" lang="ja-JP">
+                <a:solidFill>
+                  <a:srgbClr val="8C450E"/>
+                </a:solidFill>
+                <a:latin typeface="Noto Sans JP"/>
+                <a:ea typeface="Noto Sans JP"/>
+              </a:rPr>
+              <a:t>03  節目で撮る</a:t>
+            </a:r>
+          </a:p>
+        </p:txBody>
+      </p:sp>
+      <p:sp>
+        <p:nvSpPr>
+          <p:cNvPr id="20" name="Text: 作業終了／承認／Hold Point"/>
+          <p:cNvSpPr txBox="1"/>
+          <p:nvPr/>
+        </p:nvSpPr>
+        <p:spPr>
+          <a:xfrm>
+            <a:off x="8595360" y="3090672"/>
+            <a:ext cx="2834639" cy="384048"/>
+          </a:xfrm>
+          <a:prstGeom prst="rect">
+            <a:avLst/>
+          </a:prstGeom>
+          <a:noFill/>
+        </p:spPr>
+        <p:txBody>
+          <a:bodyPr wrap="square" lIns="18288" rIns="18288" tIns="18288" bIns="18288" anchor="t">
+            <a:spAutoFit/>
+          </a:bodyPr>
+          <a:lstStyle/>
+          <a:p>
+            <a:pPr algn="l">
+              <a:spcAft>
+                <a:spcPts val="0"/>
+              </a:spcAft>
+            </a:pPr>
+            <a:r>
+              <a:rPr sz="1400" b="0" lang="ja-JP">
+                <a:solidFill>
+                  <a:srgbClr val="13202B"/>
+                </a:solidFill>
+                <a:latin typeface="Noto Sans JP"/>
+                <a:ea typeface="Noto Sans JP"/>
+              </a:rPr>
+              <a:t>作業終了／承認／Hold Point</a:t>
+            </a:r>
+          </a:p>
+        </p:txBody>
+      </p:sp>
+      <p:sp>
+        <p:nvSpPr>
+          <p:cNvPr id="21" name="構想・未実装" title="構想・未実装" descr="構想・未実装"/>
+          <p:cNvSpPr/>
+          <p:nvPr/>
+        </p:nvSpPr>
+        <p:spPr>
+          <a:xfrm>
+            <a:off x="10076688" y="2441448"/>
+            <a:ext cx="1481328" cy="237744"/>
+          </a:xfrm>
+          <a:prstGeom prst="roundRect">
+            <a:avLst/>
+          </a:prstGeom>
+          <a:solidFill>
+            <a:srgbClr val="F5E4D4"/>
+          </a:solidFill>
+          <a:ln w="8890">
+            <a:solidFill>
+              <a:srgbClr val="8C450E"/>
+            </a:solidFill>
+          </a:ln>
+        </p:spPr>
+        <p:style>
+          <a:lnRef idx="1">
+            <a:schemeClr val="accent1"/>
+          </a:lnRef>
+          <a:fillRef idx="3">
+            <a:schemeClr val="accent1"/>
+          </a:fillRef>
+          <a:effectRef idx="2">
+            <a:schemeClr val="accent1"/>
+          </a:effectRef>
+          <a:fontRef idx="minor">
+            <a:schemeClr val="lt1"/>
+          </a:fontRef>
+        </p:style>
+        <p:txBody>
+          <a:bodyPr rtlCol="0" anchor="ctr" lIns="0" rIns="0" tIns="0" bIns="0"/>
+          <a:lstStyle/>
+          <a:p>
+            <a:pPr algn="ctr"/>
+            <a:r>
+              <a:rPr sz="1050" b="1" lang="ja-JP">
+                <a:solidFill>
+                  <a:srgbClr val="8C450E"/>
+                </a:solidFill>
+                <a:latin typeface="Noto Sans JP"/>
+                <a:ea typeface="Noto Sans JP"/>
+              </a:rPr>
+              <a:t>構想・未実装</a:t>
+            </a:r>
+          </a:p>
+        </p:txBody>
+      </p:sp>
+      <p:sp>
+        <p:nvSpPr>
+          <p:cNvPr id="22" name="Card: 04  3画像を比較">
+            <a:extLst>
+              <a:ext uri="{C183D7F6-B498-43B3-948B-1728B52AA6E4}">
+                <adec:decorative xmlns:adec="http://schemas.microsoft.com/office/drawing/2017/decorative" val="1"/>
+              </a:ext>
+            </a:extLst>
+          </p:cNvPr>
+          <p:cNvSpPr/>
+          <p:nvPr/>
+        </p:nvSpPr>
+        <p:spPr>
+          <a:xfrm>
+            <a:off x="658368" y="3840479"/>
+            <a:ext cx="3456432" cy="1024128"/>
+          </a:xfrm>
+          <a:prstGeom prst="roundRect">
+            <a:avLst/>
+          </a:prstGeom>
+          <a:solidFill>
+            <a:srgbClr val="FFFFFF"/>
+          </a:solidFill>
+          <a:ln w="10160">
+            <a:solidFill>
+              <a:srgbClr val="7B858A"/>
+            </a:solidFill>
+          </a:ln>
+        </p:spPr>
+        <p:style>
+          <a:lnRef idx="1">
+            <a:schemeClr val="accent1"/>
+          </a:lnRef>
+          <a:fillRef idx="3">
+            <a:schemeClr val="accent1"/>
+          </a:fillRef>
+          <a:effectRef idx="2">
+            <a:schemeClr val="accent1"/>
+          </a:effectRef>
+          <a:fontRef idx="minor">
+            <a:schemeClr val="lt1"/>
+          </a:fontRef>
+        </p:style>
+        <p:txBody>
+          <a:bodyPr rtlCol="0" anchor="ctr"/>
+          <a:lstStyle/>
+          <a:p>
+            <a:pPr algn="ctr"/>
+          </a:p>
+        </p:txBody>
+      </p:sp>
+      <p:sp>
+        <p:nvSpPr>
+          <p:cNvPr id="23" name="Accent: 04  3画像を比較">
+            <a:extLst>
+              <a:ext uri="{C183D7F6-B498-43B3-948B-1728B52AA6E4}">
+                <adec:decorative xmlns:adec="http://schemas.microsoft.com/office/drawing/2017/decorative" val="1"/>
+              </a:ext>
+            </a:extLst>
+          </p:cNvPr>
+          <p:cNvSpPr/>
+          <p:nvPr/>
+        </p:nvSpPr>
+        <p:spPr>
+          <a:xfrm>
+            <a:off x="822959" y="4005071"/>
+            <a:ext cx="128016" cy="694944"/>
+          </a:xfrm>
+          <a:prstGeom prst="roundRect">
+            <a:avLst/>
+          </a:prstGeom>
+          <a:solidFill>
+            <a:srgbClr val="5E6873"/>
+          </a:solidFill>
+          <a:ln>
+            <a:noFill/>
+          </a:ln>
+        </p:spPr>
+        <p:style>
+          <a:lnRef idx="1">
+            <a:schemeClr val="accent1"/>
+          </a:lnRef>
+          <a:fillRef idx="3">
+            <a:schemeClr val="accent1"/>
+          </a:fillRef>
+          <a:effectRef idx="2">
+            <a:schemeClr val="accent1"/>
+          </a:effectRef>
+          <a:fontRef idx="minor">
+            <a:schemeClr val="lt1"/>
+          </a:fontRef>
+        </p:style>
+        <p:txBody>
+          <a:bodyPr rtlCol="0" anchor="ctr"/>
+          <a:lstStyle/>
+          <a:p>
+            <a:pPr algn="ctr"/>
+          </a:p>
+        </p:txBody>
+      </p:sp>
+      <p:sp>
+        <p:nvSpPr>
+          <p:cNvPr id="24" name="Text: 04  3画像を比較"/>
+          <p:cNvSpPr txBox="1"/>
+          <p:nvPr/>
+        </p:nvSpPr>
+        <p:spPr>
+          <a:xfrm>
+            <a:off x="1097280" y="3968495"/>
+            <a:ext cx="2834639" cy="347472"/>
+          </a:xfrm>
+          <a:prstGeom prst="rect">
+            <a:avLst/>
+          </a:prstGeom>
+          <a:noFill/>
+        </p:spPr>
+        <p:txBody>
+          <a:bodyPr wrap="square" lIns="18288" rIns="18288" tIns="18288" bIns="18288" anchor="t">
+            <a:spAutoFit/>
+          </a:bodyPr>
+          <a:lstStyle/>
+          <a:p>
+            <a:pPr algn="l">
+              <a:spcAft>
+                <a:spcPts val="0"/>
+              </a:spcAft>
+            </a:pPr>
+            <a:r>
+              <a:rPr sz="1550" b="1" lang="ja-JP">
+                <a:solidFill>
+                  <a:srgbClr val="5E6873"/>
+                </a:solidFill>
+                <a:latin typeface="Noto Sans JP"/>
+                <a:ea typeface="Noto Sans JP"/>
+              </a:rPr>
+              <a:t>04  3画像を比較</a:t>
+            </a:r>
+          </a:p>
+        </p:txBody>
+      </p:sp>
+      <p:sp>
+        <p:nvSpPr>
+          <p:cNvPr id="25" name="Text: Original／Current／外部候補"/>
+          <p:cNvSpPr txBox="1"/>
+          <p:nvPr/>
+        </p:nvSpPr>
+        <p:spPr>
+          <a:xfrm>
+            <a:off x="1097280" y="4370831"/>
+            <a:ext cx="2834639" cy="384048"/>
+          </a:xfrm>
+          <a:prstGeom prst="rect">
+            <a:avLst/>
+          </a:prstGeom>
+          <a:noFill/>
+        </p:spPr>
+        <p:txBody>
+          <a:bodyPr wrap="square" lIns="18288" rIns="18288" tIns="18288" bIns="18288" anchor="t">
+            <a:spAutoFit/>
+          </a:bodyPr>
+          <a:lstStyle/>
+          <a:p>
+            <a:pPr algn="l">
+              <a:spcAft>
+                <a:spcPts val="0"/>
+              </a:spcAft>
+            </a:pPr>
+            <a:r>
+              <a:rPr sz="1400" b="0" lang="ja-JP">
+                <a:solidFill>
+                  <a:srgbClr val="13202B"/>
+                </a:solidFill>
+                <a:latin typeface="Noto Sans JP"/>
+                <a:ea typeface="Noto Sans JP"/>
+              </a:rPr>
+              <a:t>Original／Current／外部候補</a:t>
+            </a:r>
+          </a:p>
+        </p:txBody>
+      </p:sp>
+      <p:sp>
+        <p:nvSpPr>
+          <p:cNvPr id="26" name="今すぐ試せる·v0.9.0" title="今すぐ試せる·v0.9.0" descr="今すぐ試せる·v0.9.0"/>
+          <p:cNvSpPr/>
+          <p:nvPr/>
+        </p:nvSpPr>
+        <p:spPr>
+          <a:xfrm>
+            <a:off x="2578608" y="3721607"/>
             <a:ext cx="1481328" cy="237744"/>
           </a:xfrm>
           <a:prstGeom prst="roundRect">
@@ -5557,7 +6262,7 @@
       </p:sp>
       <p:sp>
         <p:nvSpPr>
-          <p:cNvPr id="12" name="Card: 02  条件を決める">
+          <p:cNvPr id="27" name="Card: 05  人が判断">
             <a:extLst>
               <a:ext uri="{C183D7F6-B498-43B3-948B-1728B52AA6E4}">
                 <adec:decorative xmlns:adec="http://schemas.microsoft.com/office/drawing/2017/decorative" val="1"/>
@@ -5569,7 +6274,7 @@
         </p:nvSpPr>
         <p:spPr>
           <a:xfrm>
-            <a:off x="4407407" y="2560320"/>
+            <a:off x="4407407" y="3840479"/>
             <a:ext cx="3456432" cy="1024128"/>
           </a:xfrm>
           <a:prstGeom prst="roundRect">
@@ -5608,711 +6313,6 @@
       </p:sp>
       <p:sp>
         <p:nvSpPr>
-          <p:cNvPr id="13" name="Accent: 02  条件を決める">
-            <a:extLst>
-              <a:ext uri="{C183D7F6-B498-43B3-948B-1728B52AA6E4}">
-                <adec:decorative xmlns:adec="http://schemas.microsoft.com/office/drawing/2017/decorative" val="1"/>
-              </a:ext>
-            </a:extLst>
-          </p:cNvPr>
-          <p:cNvSpPr/>
-          <p:nvPr/>
-        </p:nvSpPr>
-        <p:spPr>
-          <a:xfrm>
-            <a:off x="4571999" y="2724912"/>
-            <a:ext cx="128016" cy="694944"/>
-          </a:xfrm>
-          <a:prstGeom prst="roundRect">
-            <a:avLst/>
-          </a:prstGeom>
-          <a:solidFill>
-            <a:srgbClr val="0B6E69"/>
-          </a:solidFill>
-          <a:ln>
-            <a:noFill/>
-          </a:ln>
-        </p:spPr>
-        <p:style>
-          <a:lnRef idx="1">
-            <a:schemeClr val="accent1"/>
-          </a:lnRef>
-          <a:fillRef idx="3">
-            <a:schemeClr val="accent1"/>
-          </a:fillRef>
-          <a:effectRef idx="2">
-            <a:schemeClr val="accent1"/>
-          </a:effectRef>
-          <a:fontRef idx="minor">
-            <a:schemeClr val="lt1"/>
-          </a:fontRef>
-        </p:style>
-        <p:txBody>
-          <a:bodyPr rtlCol="0" anchor="ctr"/>
-          <a:lstStyle/>
-          <a:p>
-            <a:pPr algn="ctr"/>
-          </a:p>
-        </p:txBody>
-      </p:sp>
-      <p:sp>
-        <p:nvSpPr>
-          <p:cNvPr id="14" name="Text: 02  条件を決める"/>
-          <p:cNvSpPr txBox="1"/>
-          <p:nvPr/>
-        </p:nvSpPr>
-        <p:spPr>
-          <a:xfrm>
-            <a:off x="4846319" y="2688336"/>
-            <a:ext cx="2834639" cy="347472"/>
-          </a:xfrm>
-          <a:prstGeom prst="rect">
-            <a:avLst/>
-          </a:prstGeom>
-          <a:noFill/>
-        </p:spPr>
-        <p:txBody>
-          <a:bodyPr wrap="square" lIns="18288" rIns="18288" tIns="18288" bIns="18288" anchor="t">
-            <a:spAutoFit/>
-          </a:bodyPr>
-          <a:lstStyle/>
-          <a:p>
-            <a:pPr algn="l">
-              <a:spcAft>
-                <a:spcPts val="0"/>
-              </a:spcAft>
-            </a:pPr>
-            <a:r>
-              <a:rPr sz="1550" b="1" lang="ja-JP">
-                <a:solidFill>
-                  <a:srgbClr val="0B6E69"/>
-                </a:solidFill>
-                <a:latin typeface="Noto Sans JP"/>
-                <a:ea typeface="Noto Sans JP"/>
-              </a:rPr>
-              <a:t>02  条件を決める</a:t>
-            </a:r>
-          </a:p>
-        </p:txBody>
-      </p:sp>
-      <p:sp>
-        <p:nvSpPr>
-          <p:cNvPr id="15" name="Text: Imported／Repeatable／Cali"/>
-          <p:cNvSpPr txBox="1"/>
-          <p:nvPr/>
-        </p:nvSpPr>
-        <p:spPr>
-          <a:xfrm>
-            <a:off x="4846319" y="3090672"/>
-            <a:ext cx="2834639" cy="384048"/>
-          </a:xfrm>
-          <a:prstGeom prst="rect">
-            <a:avLst/>
-          </a:prstGeom>
-          <a:noFill/>
-        </p:spPr>
-        <p:txBody>
-          <a:bodyPr wrap="square" lIns="18288" rIns="18288" tIns="18288" bIns="18288" anchor="t">
-            <a:spAutoFit/>
-          </a:bodyPr>
-          <a:lstStyle/>
-          <a:p>
-            <a:pPr algn="l">
-              <a:spcAft>
-                <a:spcPts val="0"/>
-              </a:spcAft>
-            </a:pPr>
-            <a:r>
-              <a:rPr sz="1400" b="0" lang="ja-JP">
-                <a:solidFill>
-                  <a:srgbClr val="13202B"/>
-                </a:solidFill>
-                <a:latin typeface="Noto Sans JP"/>
-                <a:ea typeface="Noto Sans JP"/>
-              </a:rPr>
-              <a:t>Imported／Repeatable／Calibrated</a:t>
-            </a:r>
-          </a:p>
-        </p:txBody>
-      </p:sp>
-      <p:sp>
-        <p:nvSpPr>
-          <p:cNvPr id="16" name="構想・未実装" title="構想・未実装" descr="構想・未実装"/>
-          <p:cNvSpPr/>
-          <p:nvPr/>
-        </p:nvSpPr>
-        <p:spPr>
-          <a:xfrm>
-            <a:off x="6327648" y="2441448"/>
-            <a:ext cx="1481328" cy="237744"/>
-          </a:xfrm>
-          <a:prstGeom prst="roundRect">
-            <a:avLst/>
-          </a:prstGeom>
-          <a:solidFill>
-            <a:srgbClr val="F5E4D4"/>
-          </a:solidFill>
-          <a:ln w="8890">
-            <a:solidFill>
-              <a:srgbClr val="8C450E"/>
-            </a:solidFill>
-          </a:ln>
-        </p:spPr>
-        <p:style>
-          <a:lnRef idx="1">
-            <a:schemeClr val="accent1"/>
-          </a:lnRef>
-          <a:fillRef idx="3">
-            <a:schemeClr val="accent1"/>
-          </a:fillRef>
-          <a:effectRef idx="2">
-            <a:schemeClr val="accent1"/>
-          </a:effectRef>
-          <a:fontRef idx="minor">
-            <a:schemeClr val="lt1"/>
-          </a:fontRef>
-        </p:style>
-        <p:txBody>
-          <a:bodyPr rtlCol="0" anchor="ctr" lIns="0" rIns="0" tIns="0" bIns="0"/>
-          <a:lstStyle/>
-          <a:p>
-            <a:pPr algn="ctr"/>
-            <a:r>
-              <a:rPr sz="1050" b="1" lang="ja-JP">
-                <a:solidFill>
-                  <a:srgbClr val="8C450E"/>
-                </a:solidFill>
-                <a:latin typeface="Noto Sans JP"/>
-                <a:ea typeface="Noto Sans JP"/>
-              </a:rPr>
-              <a:t>構想・未実装</a:t>
-            </a:r>
-          </a:p>
-        </p:txBody>
-      </p:sp>
-      <p:sp>
-        <p:nvSpPr>
-          <p:cNvPr id="17" name="Card: 03  節目で撮る">
-            <a:extLst>
-              <a:ext uri="{C183D7F6-B498-43B3-948B-1728B52AA6E4}">
-                <adec:decorative xmlns:adec="http://schemas.microsoft.com/office/drawing/2017/decorative" val="1"/>
-              </a:ext>
-            </a:extLst>
-          </p:cNvPr>
-          <p:cNvSpPr/>
-          <p:nvPr/>
-        </p:nvSpPr>
-        <p:spPr>
-          <a:xfrm>
-            <a:off x="8156448" y="2560320"/>
-            <a:ext cx="3456432" cy="1024128"/>
-          </a:xfrm>
-          <a:prstGeom prst="roundRect">
-            <a:avLst/>
-          </a:prstGeom>
-          <a:solidFill>
-            <a:srgbClr val="FFFFFF"/>
-          </a:solidFill>
-          <a:ln w="10160">
-            <a:solidFill>
-              <a:srgbClr val="7B858A"/>
-            </a:solidFill>
-          </a:ln>
-        </p:spPr>
-        <p:style>
-          <a:lnRef idx="1">
-            <a:schemeClr val="accent1"/>
-          </a:lnRef>
-          <a:fillRef idx="3">
-            <a:schemeClr val="accent1"/>
-          </a:fillRef>
-          <a:effectRef idx="2">
-            <a:schemeClr val="accent1"/>
-          </a:effectRef>
-          <a:fontRef idx="minor">
-            <a:schemeClr val="lt1"/>
-          </a:fontRef>
-        </p:style>
-        <p:txBody>
-          <a:bodyPr rtlCol="0" anchor="ctr"/>
-          <a:lstStyle/>
-          <a:p>
-            <a:pPr algn="ctr"/>
-          </a:p>
-        </p:txBody>
-      </p:sp>
-      <p:sp>
-        <p:nvSpPr>
-          <p:cNvPr id="18" name="Accent: 03  節目で撮る">
-            <a:extLst>
-              <a:ext uri="{C183D7F6-B498-43B3-948B-1728B52AA6E4}">
-                <adec:decorative xmlns:adec="http://schemas.microsoft.com/office/drawing/2017/decorative" val="1"/>
-              </a:ext>
-            </a:extLst>
-          </p:cNvPr>
-          <p:cNvSpPr/>
-          <p:nvPr/>
-        </p:nvSpPr>
-        <p:spPr>
-          <a:xfrm>
-            <a:off x="8321040" y="2724912"/>
-            <a:ext cx="128016" cy="694944"/>
-          </a:xfrm>
-          <a:prstGeom prst="roundRect">
-            <a:avLst/>
-          </a:prstGeom>
-          <a:solidFill>
-            <a:srgbClr val="8C450E"/>
-          </a:solidFill>
-          <a:ln>
-            <a:noFill/>
-          </a:ln>
-        </p:spPr>
-        <p:style>
-          <a:lnRef idx="1">
-            <a:schemeClr val="accent1"/>
-          </a:lnRef>
-          <a:fillRef idx="3">
-            <a:schemeClr val="accent1"/>
-          </a:fillRef>
-          <a:effectRef idx="2">
-            <a:schemeClr val="accent1"/>
-          </a:effectRef>
-          <a:fontRef idx="minor">
-            <a:schemeClr val="lt1"/>
-          </a:fontRef>
-        </p:style>
-        <p:txBody>
-          <a:bodyPr rtlCol="0" anchor="ctr"/>
-          <a:lstStyle/>
-          <a:p>
-            <a:pPr algn="ctr"/>
-          </a:p>
-        </p:txBody>
-      </p:sp>
-      <p:sp>
-        <p:nvSpPr>
-          <p:cNvPr id="19" name="Text: 03  節目で撮る"/>
-          <p:cNvSpPr txBox="1"/>
-          <p:nvPr/>
-        </p:nvSpPr>
-        <p:spPr>
-          <a:xfrm>
-            <a:off x="8595360" y="2688336"/>
-            <a:ext cx="2834639" cy="347472"/>
-          </a:xfrm>
-          <a:prstGeom prst="rect">
-            <a:avLst/>
-          </a:prstGeom>
-          <a:noFill/>
-        </p:spPr>
-        <p:txBody>
-          <a:bodyPr wrap="square" lIns="18288" rIns="18288" tIns="18288" bIns="18288" anchor="t">
-            <a:spAutoFit/>
-          </a:bodyPr>
-          <a:lstStyle/>
-          <a:p>
-            <a:pPr algn="l">
-              <a:spcAft>
-                <a:spcPts val="0"/>
-              </a:spcAft>
-            </a:pPr>
-            <a:r>
-              <a:rPr sz="1550" b="1" lang="ja-JP">
-                <a:solidFill>
-                  <a:srgbClr val="8C450E"/>
-                </a:solidFill>
-                <a:latin typeface="Noto Sans JP"/>
-                <a:ea typeface="Noto Sans JP"/>
-              </a:rPr>
-              <a:t>03  節目で撮る</a:t>
-            </a:r>
-          </a:p>
-        </p:txBody>
-      </p:sp>
-      <p:sp>
-        <p:nvSpPr>
-          <p:cNvPr id="20" name="Text: 作業終了／承認／Hold Point"/>
-          <p:cNvSpPr txBox="1"/>
-          <p:nvPr/>
-        </p:nvSpPr>
-        <p:spPr>
-          <a:xfrm>
-            <a:off x="8595360" y="3090672"/>
-            <a:ext cx="2834639" cy="384048"/>
-          </a:xfrm>
-          <a:prstGeom prst="rect">
-            <a:avLst/>
-          </a:prstGeom>
-          <a:noFill/>
-        </p:spPr>
-        <p:txBody>
-          <a:bodyPr wrap="square" lIns="18288" rIns="18288" tIns="18288" bIns="18288" anchor="t">
-            <a:spAutoFit/>
-          </a:bodyPr>
-          <a:lstStyle/>
-          <a:p>
-            <a:pPr algn="l">
-              <a:spcAft>
-                <a:spcPts val="0"/>
-              </a:spcAft>
-            </a:pPr>
-            <a:r>
-              <a:rPr sz="1400" b="0" lang="ja-JP">
-                <a:solidFill>
-                  <a:srgbClr val="13202B"/>
-                </a:solidFill>
-                <a:latin typeface="Noto Sans JP"/>
-                <a:ea typeface="Noto Sans JP"/>
-              </a:rPr>
-              <a:t>作業終了／承認／Hold Point</a:t>
-            </a:r>
-          </a:p>
-        </p:txBody>
-      </p:sp>
-      <p:sp>
-        <p:nvSpPr>
-          <p:cNvPr id="21" name="構想・未実装" title="構想・未実装" descr="構想・未実装"/>
-          <p:cNvSpPr/>
-          <p:nvPr/>
-        </p:nvSpPr>
-        <p:spPr>
-          <a:xfrm>
-            <a:off x="10076688" y="2441448"/>
-            <a:ext cx="1481328" cy="237744"/>
-          </a:xfrm>
-          <a:prstGeom prst="roundRect">
-            <a:avLst/>
-          </a:prstGeom>
-          <a:solidFill>
-            <a:srgbClr val="F5E4D4"/>
-          </a:solidFill>
-          <a:ln w="8890">
-            <a:solidFill>
-              <a:srgbClr val="8C450E"/>
-            </a:solidFill>
-          </a:ln>
-        </p:spPr>
-        <p:style>
-          <a:lnRef idx="1">
-            <a:schemeClr val="accent1"/>
-          </a:lnRef>
-          <a:fillRef idx="3">
-            <a:schemeClr val="accent1"/>
-          </a:fillRef>
-          <a:effectRef idx="2">
-            <a:schemeClr val="accent1"/>
-          </a:effectRef>
-          <a:fontRef idx="minor">
-            <a:schemeClr val="lt1"/>
-          </a:fontRef>
-        </p:style>
-        <p:txBody>
-          <a:bodyPr rtlCol="0" anchor="ctr" lIns="0" rIns="0" tIns="0" bIns="0"/>
-          <a:lstStyle/>
-          <a:p>
-            <a:pPr algn="ctr"/>
-            <a:r>
-              <a:rPr sz="1050" b="1" lang="ja-JP">
-                <a:solidFill>
-                  <a:srgbClr val="8C450E"/>
-                </a:solidFill>
-                <a:latin typeface="Noto Sans JP"/>
-                <a:ea typeface="Noto Sans JP"/>
-              </a:rPr>
-              <a:t>構想・未実装</a:t>
-            </a:r>
-          </a:p>
-        </p:txBody>
-      </p:sp>
-      <p:sp>
-        <p:nvSpPr>
-          <p:cNvPr id="22" name="Card: 04  三者比較">
-            <a:extLst>
-              <a:ext uri="{C183D7F6-B498-43B3-948B-1728B52AA6E4}">
-                <adec:decorative xmlns:adec="http://schemas.microsoft.com/office/drawing/2017/decorative" val="1"/>
-              </a:ext>
-            </a:extLst>
-          </p:cNvPr>
-          <p:cNvSpPr/>
-          <p:nvPr/>
-        </p:nvSpPr>
-        <p:spPr>
-          <a:xfrm>
-            <a:off x="658368" y="3840479"/>
-            <a:ext cx="3456432" cy="1024128"/>
-          </a:xfrm>
-          <a:prstGeom prst="roundRect">
-            <a:avLst/>
-          </a:prstGeom>
-          <a:solidFill>
-            <a:srgbClr val="FFFFFF"/>
-          </a:solidFill>
-          <a:ln w="10160">
-            <a:solidFill>
-              <a:srgbClr val="7B858A"/>
-            </a:solidFill>
-          </a:ln>
-        </p:spPr>
-        <p:style>
-          <a:lnRef idx="1">
-            <a:schemeClr val="accent1"/>
-          </a:lnRef>
-          <a:fillRef idx="3">
-            <a:schemeClr val="accent1"/>
-          </a:fillRef>
-          <a:effectRef idx="2">
-            <a:schemeClr val="accent1"/>
-          </a:effectRef>
-          <a:fontRef idx="minor">
-            <a:schemeClr val="lt1"/>
-          </a:fontRef>
-        </p:style>
-        <p:txBody>
-          <a:bodyPr rtlCol="0" anchor="ctr"/>
-          <a:lstStyle/>
-          <a:p>
-            <a:pPr algn="ctr"/>
-          </a:p>
-        </p:txBody>
-      </p:sp>
-      <p:sp>
-        <p:nvSpPr>
-          <p:cNvPr id="23" name="Accent: 04  三者比較">
-            <a:extLst>
-              <a:ext uri="{C183D7F6-B498-43B3-948B-1728B52AA6E4}">
-                <adec:decorative xmlns:adec="http://schemas.microsoft.com/office/drawing/2017/decorative" val="1"/>
-              </a:ext>
-            </a:extLst>
-          </p:cNvPr>
-          <p:cNvSpPr/>
-          <p:nvPr/>
-        </p:nvSpPr>
-        <p:spPr>
-          <a:xfrm>
-            <a:off x="822959" y="4005071"/>
-            <a:ext cx="128016" cy="694944"/>
-          </a:xfrm>
-          <a:prstGeom prst="roundRect">
-            <a:avLst/>
-          </a:prstGeom>
-          <a:solidFill>
-            <a:srgbClr val="5E6873"/>
-          </a:solidFill>
-          <a:ln>
-            <a:noFill/>
-          </a:ln>
-        </p:spPr>
-        <p:style>
-          <a:lnRef idx="1">
-            <a:schemeClr val="accent1"/>
-          </a:lnRef>
-          <a:fillRef idx="3">
-            <a:schemeClr val="accent1"/>
-          </a:fillRef>
-          <a:effectRef idx="2">
-            <a:schemeClr val="accent1"/>
-          </a:effectRef>
-          <a:fontRef idx="minor">
-            <a:schemeClr val="lt1"/>
-          </a:fontRef>
-        </p:style>
-        <p:txBody>
-          <a:bodyPr rtlCol="0" anchor="ctr"/>
-          <a:lstStyle/>
-          <a:p>
-            <a:pPr algn="ctr"/>
-          </a:p>
-        </p:txBody>
-      </p:sp>
-      <p:sp>
-        <p:nvSpPr>
-          <p:cNvPr id="24" name="Text: 04  三者比較"/>
-          <p:cNvSpPr txBox="1"/>
-          <p:nvPr/>
-        </p:nvSpPr>
-        <p:spPr>
-          <a:xfrm>
-            <a:off x="1097280" y="3968495"/>
-            <a:ext cx="2834639" cy="347472"/>
-          </a:xfrm>
-          <a:prstGeom prst="rect">
-            <a:avLst/>
-          </a:prstGeom>
-          <a:noFill/>
-        </p:spPr>
-        <p:txBody>
-          <a:bodyPr wrap="square" lIns="18288" rIns="18288" tIns="18288" bIns="18288" anchor="t">
-            <a:spAutoFit/>
-          </a:bodyPr>
-          <a:lstStyle/>
-          <a:p>
-            <a:pPr algn="l">
-              <a:spcAft>
-                <a:spcPts val="0"/>
-              </a:spcAft>
-            </a:pPr>
-            <a:r>
-              <a:rPr sz="1550" b="1" lang="ja-JP">
-                <a:solidFill>
-                  <a:srgbClr val="5E6873"/>
-                </a:solidFill>
-                <a:latin typeface="Noto Sans JP"/>
-                <a:ea typeface="Noto Sans JP"/>
-              </a:rPr>
-              <a:t>04  三者比較</a:t>
-            </a:r>
-          </a:p>
-        </p:txBody>
-      </p:sp>
-      <p:sp>
-        <p:nvSpPr>
-          <p:cNvPr id="25" name="Text: Plan／Previous／Current"/>
-          <p:cNvSpPr txBox="1"/>
-          <p:nvPr/>
-        </p:nvSpPr>
-        <p:spPr>
-          <a:xfrm>
-            <a:off x="1097280" y="4370831"/>
-            <a:ext cx="2834639" cy="384048"/>
-          </a:xfrm>
-          <a:prstGeom prst="rect">
-            <a:avLst/>
-          </a:prstGeom>
-          <a:noFill/>
-        </p:spPr>
-        <p:txBody>
-          <a:bodyPr wrap="square" lIns="18288" rIns="18288" tIns="18288" bIns="18288" anchor="t">
-            <a:spAutoFit/>
-          </a:bodyPr>
-          <a:lstStyle/>
-          <a:p>
-            <a:pPr algn="l">
-              <a:spcAft>
-                <a:spcPts val="0"/>
-              </a:spcAft>
-            </a:pPr>
-            <a:r>
-              <a:rPr sz="1400" b="0" lang="ja-JP">
-                <a:solidFill>
-                  <a:srgbClr val="13202B"/>
-                </a:solidFill>
-                <a:latin typeface="Noto Sans JP"/>
-                <a:ea typeface="Noto Sans JP"/>
-              </a:rPr>
-              <a:t>Plan／Previous／Current</a:t>
-            </a:r>
-          </a:p>
-        </p:txBody>
-      </p:sp>
-      <p:sp>
-        <p:nvSpPr>
-          <p:cNvPr id="26" name="構想・未実装" title="構想・未実装" descr="構想・未実装"/>
-          <p:cNvSpPr/>
-          <p:nvPr/>
-        </p:nvSpPr>
-        <p:spPr>
-          <a:xfrm>
-            <a:off x="2578608" y="3721607"/>
-            <a:ext cx="1481328" cy="237744"/>
-          </a:xfrm>
-          <a:prstGeom prst="roundRect">
-            <a:avLst/>
-          </a:prstGeom>
-          <a:solidFill>
-            <a:srgbClr val="F5E4D4"/>
-          </a:solidFill>
-          <a:ln w="8890">
-            <a:solidFill>
-              <a:srgbClr val="8C450E"/>
-            </a:solidFill>
-          </a:ln>
-        </p:spPr>
-        <p:style>
-          <a:lnRef idx="1">
-            <a:schemeClr val="accent1"/>
-          </a:lnRef>
-          <a:fillRef idx="3">
-            <a:schemeClr val="accent1"/>
-          </a:fillRef>
-          <a:effectRef idx="2">
-            <a:schemeClr val="accent1"/>
-          </a:effectRef>
-          <a:fontRef idx="minor">
-            <a:schemeClr val="lt1"/>
-          </a:fontRef>
-        </p:style>
-        <p:txBody>
-          <a:bodyPr rtlCol="0" anchor="ctr" lIns="0" rIns="0" tIns="0" bIns="0"/>
-          <a:lstStyle/>
-          <a:p>
-            <a:pPr algn="ctr"/>
-            <a:r>
-              <a:rPr sz="1050" b="1" lang="ja-JP">
-                <a:solidFill>
-                  <a:srgbClr val="8C450E"/>
-                </a:solidFill>
-                <a:latin typeface="Noto Sans JP"/>
-                <a:ea typeface="Noto Sans JP"/>
-              </a:rPr>
-              <a:t>構想・未実装</a:t>
-            </a:r>
-          </a:p>
-        </p:txBody>
-      </p:sp>
-      <p:sp>
-        <p:nvSpPr>
-          <p:cNvPr id="27" name="Card: 05  人が判断">
-            <a:extLst>
-              <a:ext uri="{C183D7F6-B498-43B3-948B-1728B52AA6E4}">
-                <adec:decorative xmlns:adec="http://schemas.microsoft.com/office/drawing/2017/decorative" val="1"/>
-              </a:ext>
-            </a:extLst>
-          </p:cNvPr>
-          <p:cNvSpPr/>
-          <p:nvPr/>
-        </p:nvSpPr>
-        <p:spPr>
-          <a:xfrm>
-            <a:off x="4407407" y="3840479"/>
-            <a:ext cx="3456432" cy="1024128"/>
-          </a:xfrm>
-          <a:prstGeom prst="roundRect">
-            <a:avLst/>
-          </a:prstGeom>
-          <a:solidFill>
-            <a:srgbClr val="FFFFFF"/>
-          </a:solidFill>
-          <a:ln w="10160">
-            <a:solidFill>
-              <a:srgbClr val="7B858A"/>
-            </a:solidFill>
-          </a:ln>
-        </p:spPr>
-        <p:style>
-          <a:lnRef idx="1">
-            <a:schemeClr val="accent1"/>
-          </a:lnRef>
-          <a:fillRef idx="3">
-            <a:schemeClr val="accent1"/>
-          </a:fillRef>
-          <a:effectRef idx="2">
-            <a:schemeClr val="accent1"/>
-          </a:effectRef>
-          <a:fontRef idx="minor">
-            <a:schemeClr val="lt1"/>
-          </a:fontRef>
-        </p:style>
-        <p:txBody>
-          <a:bodyPr rtlCol="0" anchor="ctr"/>
-          <a:lstStyle/>
-          <a:p>
-            <a:pPr algn="ctr"/>
-          </a:p>
-        </p:txBody>
-      </p:sp>
-      <p:sp>
-        <p:nvSpPr>
           <p:cNvPr id="28" name="Accent: 05  人が判断">
             <a:extLst>
               <a:ext uri="{C183D7F6-B498-43B3-948B-1728B52AA6E4}">
@@ -6402,7 +6402,7 @@
       </p:sp>
       <p:sp>
         <p:nvSpPr>
-          <p:cNvPr id="30" name="Text: 採用／是正／保留／不明"/>
+          <p:cNvPr id="30" name="Text: Adopt／Reject／Defer"/>
           <p:cNvSpPr txBox="1"/>
           <p:nvPr/>
         </p:nvSpPr>
@@ -6435,7 +6435,7 @@
                 <a:latin typeface="Noto Sans JP"/>
                 <a:ea typeface="Noto Sans JP"/>
               </a:rPr>
-              <a:t>採用／是正／保留／不明</a:t>
+              <a:t>Adopt／Reject／Defer</a:t>
             </a:r>
           </a:p>
         </p:txBody>
@@ -14270,56 +14270,7 @@
       </p:sp>
       <p:sp>
         <p:nvSpPr>
-          <p:cNvPr id="29" name="Chevron 28">
-            <a:extLst>
-              <a:ext uri="{C183D7F6-B498-43B3-948B-1728B52AA6E4}">
-                <adec:decorative xmlns:adec="http://schemas.microsoft.com/office/drawing/2017/decorative" val="1"/>
-              </a:ext>
-            </a:extLst>
-          </p:cNvPr>
-          <p:cNvSpPr/>
-          <p:nvPr/>
-        </p:nvSpPr>
-        <p:spPr>
-          <a:xfrm>
-            <a:off x="8503920" y="3429000"/>
-            <a:ext cx="310896" cy="384048"/>
-          </a:xfrm>
-          <a:prstGeom prst="chevron">
-            <a:avLst/>
-          </a:prstGeom>
-          <a:solidFill>
-            <a:srgbClr val="7B858A"/>
-          </a:solidFill>
-          <a:ln>
-            <a:noFill/>
-          </a:ln>
-        </p:spPr>
-        <p:style>
-          <a:lnRef idx="1">
-            <a:schemeClr val="accent1"/>
-          </a:lnRef>
-          <a:fillRef idx="3">
-            <a:schemeClr val="accent1"/>
-          </a:fillRef>
-          <a:effectRef idx="2">
-            <a:schemeClr val="accent1"/>
-          </a:effectRef>
-          <a:fontRef idx="minor">
-            <a:schemeClr val="lt1"/>
-          </a:fontRef>
-        </p:style>
-        <p:txBody>
-          <a:bodyPr rtlCol="0" anchor="ctr"/>
-          <a:lstStyle/>
-          <a:p>
-            <a:pPr algn="ctr"/>
-          </a:p>
-        </p:txBody>
-      </p:sp>
-      <p:sp>
-        <p:nvSpPr>
-          <p:cNvPr id="30" name="Card: creator-report">
+          <p:cNvPr id="29" name="Card: creator-report">
             <a:extLst>
               <a:ext uri="{C183D7F6-B498-43B3-948B-1728B52AA6E4}">
                 <adec:decorative xmlns:adec="http://schemas.microsoft.com/office/drawing/2017/decorative" val="1"/>
@@ -14370,7 +14321,7 @@
       </p:sp>
       <p:sp>
         <p:nvSpPr>
-          <p:cNvPr id="31" name="Accent: creator-report">
+          <p:cNvPr id="30" name="Accent: creator-report">
             <a:extLst>
               <a:ext uri="{C183D7F6-B498-43B3-948B-1728B52AA6E4}">
                 <adec:decorative xmlns:adec="http://schemas.microsoft.com/office/drawing/2017/decorative" val="1"/>
@@ -14419,7 +14370,7 @@
       </p:sp>
       <p:sp>
         <p:nvSpPr>
-          <p:cNvPr id="32" name="Text: creator-report"/>
+          <p:cNvPr id="31" name="Text: creator-report"/>
           <p:cNvSpPr txBox="1"/>
           <p:nvPr/>
         </p:nvSpPr>
@@ -14459,7 +14410,7 @@
       </p:sp>
       <p:sp>
         <p:nvSpPr>
-          <p:cNvPr id="33" name="Text: CLI出力"/>
+          <p:cNvPr id="32" name="Text: CLI出力"/>
           <p:cNvSpPr txBox="1"/>
           <p:nvPr/>
         </p:nvSpPr>
@@ -14499,7 +14450,7 @@
       </p:sp>
       <p:sp>
         <p:nvSpPr>
-          <p:cNvPr id="34" name="Card: localhost UI">
+          <p:cNvPr id="33" name="Card: localhost UI">
             <a:extLst>
               <a:ext uri="{C183D7F6-B498-43B3-948B-1728B52AA6E4}">
                 <adec:decorative xmlns:adec="http://schemas.microsoft.com/office/drawing/2017/decorative" val="1"/>
@@ -14550,7 +14501,7 @@
       </p:sp>
       <p:sp>
         <p:nvSpPr>
-          <p:cNvPr id="35" name="Accent: localhost UI">
+          <p:cNvPr id="34" name="Accent: localhost UI">
             <a:extLst>
               <a:ext uri="{C183D7F6-B498-43B3-948B-1728B52AA6E4}">
                 <adec:decorative xmlns:adec="http://schemas.microsoft.com/office/drawing/2017/decorative" val="1"/>
@@ -14599,7 +14550,7 @@
       </p:sp>
       <p:sp>
         <p:nvSpPr>
-          <p:cNvPr id="36" name="Text: localhost UI"/>
+          <p:cNvPr id="35" name="Text: localhost UI"/>
           <p:cNvSpPr txBox="1"/>
           <p:nvPr/>
         </p:nvSpPr>
@@ -14639,7 +14590,7 @@
       </p:sp>
       <p:sp>
         <p:nvSpPr>
-          <p:cNvPr id="37" name="Text: pending／完了画面"/>
+          <p:cNvPr id="36" name="Text: pending／完了画面"/>
           <p:cNvSpPr txBox="1"/>
           <p:nvPr/>
         </p:nvSpPr>
@@ -14679,7 +14630,7 @@
       </p:sp>
       <p:sp>
         <p:nvSpPr>
-          <p:cNvPr id="38" name="Card: publication view">
+          <p:cNvPr id="37" name="Card: publication view">
             <a:extLst>
               <a:ext uri="{C183D7F6-B498-43B3-948B-1728B52AA6E4}">
                 <adec:decorative xmlns:adec="http://schemas.microsoft.com/office/drawing/2017/decorative" val="1"/>
@@ -14730,7 +14681,7 @@
       </p:sp>
       <p:sp>
         <p:nvSpPr>
-          <p:cNvPr id="39" name="Accent: publication view">
+          <p:cNvPr id="38" name="Accent: publication view">
             <a:extLst>
               <a:ext uri="{C183D7F6-B498-43B3-948B-1728B52AA6E4}">
                 <adec:decorative xmlns:adec="http://schemas.microsoft.com/office/drawing/2017/decorative" val="1"/>
@@ -14779,7 +14730,7 @@
       </p:sp>
       <p:sp>
         <p:nvSpPr>
-          <p:cNvPr id="40" name="Text: publication view"/>
+          <p:cNvPr id="39" name="Text: publication view"/>
           <p:cNvSpPr txBox="1"/>
           <p:nvPr/>
         </p:nvSpPr>
@@ -14819,7 +14770,7 @@
       </p:sp>
       <p:sp>
         <p:nvSpPr>
-          <p:cNvPr id="41" name="Text: ローカル生成のみ"/>
+          <p:cNvPr id="40" name="Text: ローカル生成のみ"/>
           <p:cNvSpPr txBox="1"/>
           <p:nvPr/>
         </p:nvSpPr>
@@ -14857,6 +14808,47 @@
           </a:p>
         </p:txBody>
       </p:sp>
+      <p:cxnSp>
+        <p:nvCxnSpPr>
+          <p:cNvPr id="41" name="Connector 40">
+            <a:extLst>
+              <a:ext uri="{C183D7F6-B498-43B3-948B-1728B52AA6E4}">
+                <adec:decorative xmlns:adec="http://schemas.microsoft.com/office/drawing/2017/decorative" val="1"/>
+              </a:ext>
+            </a:extLst>
+          </p:cNvPr>
+          <p:cNvCxnSpPr/>
+          <p:nvPr/>
+        </p:nvCxnSpPr>
+        <p:spPr>
+          <a:xfrm flipV="1">
+            <a:off x="8375904" y="2034540"/>
+            <a:ext cx="585216" cy="1581912"/>
+          </a:xfrm>
+          <a:prstGeom prst="line">
+            <a:avLst/>
+          </a:prstGeom>
+          <a:ln w="17780">
+            <a:solidFill>
+              <a:srgbClr val="7B858A"/>
+            </a:solidFill>
+          </a:ln>
+        </p:spPr>
+        <p:style>
+          <a:lnRef idx="2">
+            <a:schemeClr val="accent1"/>
+          </a:lnRef>
+          <a:fillRef idx="0">
+            <a:schemeClr val="accent1"/>
+          </a:fillRef>
+          <a:effectRef idx="1">
+            <a:schemeClr val="accent1"/>
+          </a:effectRef>
+          <a:fontRef idx="minor">
+            <a:schemeClr val="tx1"/>
+          </a:fontRef>
+        </p:style>
+      </p:cxnSp>
       <p:cxnSp>
         <p:nvCxnSpPr>
           <p:cNvPr id="42" name="Connector 41">
@@ -14871,8 +14863,8 @@
         </p:nvCxnSpPr>
         <p:spPr>
           <a:xfrm flipV="1">
-            <a:off x="8375904" y="2034540"/>
-            <a:ext cx="585216" cy="1581912"/>
+            <a:off x="8375904" y="3012948"/>
+            <a:ext cx="585216" cy="603504"/>
           </a:xfrm>
           <a:prstGeom prst="line">
             <a:avLst/>
@@ -14911,9 +14903,9 @@
           <p:nvPr/>
         </p:nvCxnSpPr>
         <p:spPr>
-          <a:xfrm flipV="1">
-            <a:off x="8375904" y="3012948"/>
-            <a:ext cx="585216" cy="603504"/>
+          <a:xfrm>
+            <a:off x="8375904" y="3616452"/>
+            <a:ext cx="585216" cy="374904"/>
           </a:xfrm>
           <a:prstGeom prst="line">
             <a:avLst/>
@@ -14939,50 +14931,9 @@
           </a:fontRef>
         </p:style>
       </p:cxnSp>
-      <p:cxnSp>
-        <p:nvCxnSpPr>
-          <p:cNvPr id="44" name="Connector 43">
-            <a:extLst>
-              <a:ext uri="{C183D7F6-B498-43B3-948B-1728B52AA6E4}">
-                <adec:decorative xmlns:adec="http://schemas.microsoft.com/office/drawing/2017/decorative" val="1"/>
-              </a:ext>
-            </a:extLst>
-          </p:cNvPr>
-          <p:cNvCxnSpPr/>
-          <p:nvPr/>
-        </p:nvCxnSpPr>
-        <p:spPr>
-          <a:xfrm>
-            <a:off x="8375904" y="3616452"/>
-            <a:ext cx="585216" cy="374904"/>
-          </a:xfrm>
-          <a:prstGeom prst="line">
-            <a:avLst/>
-          </a:prstGeom>
-          <a:ln w="17780">
-            <a:solidFill>
-              <a:srgbClr val="7B858A"/>
-            </a:solidFill>
-          </a:ln>
-        </p:spPr>
-        <p:style>
-          <a:lnRef idx="2">
-            <a:schemeClr val="accent1"/>
-          </a:lnRef>
-          <a:fillRef idx="0">
-            <a:schemeClr val="accent1"/>
-          </a:fillRef>
-          <a:effectRef idx="1">
-            <a:schemeClr val="accent1"/>
-          </a:effectRef>
-          <a:fontRef idx="minor">
-            <a:schemeClr val="tx1"/>
-          </a:fontRef>
-        </p:style>
-      </p:cxnSp>
-      <p:sp>
-        <p:nvSpPr>
-          <p:cNvPr id="45" name="Rounded Rectangle 44">
+      <p:sp>
+        <p:nvSpPr>
+          <p:cNvPr id="44" name="Rounded Rectangle 43">
             <a:extLst>
               <a:ext uri="{C183D7F6-B498-43B3-948B-1728B52AA6E4}">
                 <adec:decorative xmlns:adec="http://schemas.microsoft.com/office/drawing/2017/decorative" val="1"/>
@@ -15033,7 +14984,7 @@
       </p:sp>
       <p:sp>
         <p:nvSpPr>
-          <p:cNvPr id="46" name="TextBox 45"/>
+          <p:cNvPr id="45" name="TextBox 44"/>
           <p:cNvSpPr txBox="1"/>
           <p:nvPr/>
         </p:nvSpPr>
@@ -15121,7 +15072,7 @@
       </p:sp>
       <p:sp>
         <p:nvSpPr>
-          <p:cNvPr id="47" name="Text: しないこと：AIの自動実行・自動採否／画像の意味"/>
+          <p:cNvPr id="46" name="Text: しないこと：AIの自動実行・自動採否／画像の意味"/>
           <p:cNvSpPr txBox="1"/>
           <p:nvPr/>
         </p:nvSpPr>
@@ -15161,7 +15112,7 @@
       </p:sp>
       <p:sp>
         <p:nvSpPr>
-          <p:cNvPr id="48" name="Text: 詳しい手順: 15分 壁画tutorial"/>
+          <p:cNvPr id="47" name="Text: 詳しい手順: 15分 壁画tutorial"/>
           <p:cNvSpPr txBox="1"/>
           <p:nvPr/>
         </p:nvSpPr>
@@ -15202,7 +15153,7 @@
       </p:sp>
       <p:cxnSp>
         <p:nvCxnSpPr>
-          <p:cNvPr id="49" name="Connector 48">
+          <p:cNvPr id="48" name="Connector 47">
             <a:extLst>
               <a:ext uri="{C183D7F6-B498-43B3-948B-1728B52AA6E4}">
                 <adec:decorative xmlns:adec="http://schemas.microsoft.com/office/drawing/2017/decorative" val="1"/>
@@ -15243,7 +15194,7 @@
       </p:cxnSp>
       <p:sp>
         <p:nvSpPr>
-          <p:cNvPr id="50" name="Text: Concept · v0.9.0 · 確認日 2"/>
+          <p:cNvPr id="49" name="Text: Concept · v0.9.0 · 確認日 2"/>
           <p:cNvSpPr txBox="1"/>
           <p:nvPr/>
         </p:nvSpPr>
@@ -15284,7 +15235,7 @@
       </p:sp>
       <p:sp>
         <p:nvSpPr>
-          <p:cNvPr id="51" name="Text: Creator workflow §§1-3 ·"/>
+          <p:cNvPr id="50" name="Text: Creator workflow §§1-3 ·"/>
           <p:cNvSpPr txBox="1"/>
           <p:nvPr/>
         </p:nvSpPr>
@@ -15324,7 +15275,7 @@
       </p:sp>
       <p:sp>
         <p:nvSpPr>
-          <p:cNvPr id="52" name="Text: 04"/>
+          <p:cNvPr id="51" name="Text: 04"/>
           <p:cNvSpPr txBox="1"/>
           <p:nvPr/>
         </p:nvSpPr>
